--- a/备选资产/结构图/转化漏斗-001/example.pptx
+++ b/备选资产/结构图/转化漏斗-001/example.pptx
@@ -2,13 +2,13 @@
 <file path=ppt/presentation.xml><?xml version="1.0" encoding="utf-8"?>
 <p:presentation xmlns:p="http://schemas.openxmlformats.org/presentationml/2006/main">
   <p:sldMasterIdLst>
-    <p:sldMasterId xmlns:r="http://schemas.openxmlformats.org/officeDocument/2006/relationships" id="2147483648" r:id="R37f55c7acc0144f2"/>
+    <p:sldMasterId xmlns:r="http://schemas.openxmlformats.org/officeDocument/2006/relationships" id="2147483648" r:id="R362ea8e1f4f94e41"/>
   </p:sldMasterIdLst>
   <p:notesMasterIdLst>
-    <p:notesMasterId xmlns:r="http://schemas.openxmlformats.org/officeDocument/2006/relationships" r:id="R2ee5d42985784b61"/>
+    <p:notesMasterId xmlns:r="http://schemas.openxmlformats.org/officeDocument/2006/relationships" r:id="R21f2373e69634690"/>
   </p:notesMasterIdLst>
   <p:sldIdLst>
-    <p:sldId xmlns:r="http://schemas.openxmlformats.org/officeDocument/2006/relationships" id="256" r:id="Rf28527c8a9eb48ca"/>
+    <p:sldId xmlns:r="http://schemas.openxmlformats.org/officeDocument/2006/relationships" id="256" r:id="R67518088d3764812"/>
   </p:sldIdLst>
   <p:sldSz cx="12192000" cy="6858000"/>
   <p:notesSz cx="6858000" cy="9144000"/>
@@ -506,7 +506,7 @@
   </p:cSld>
   <p:clrMap bg1="lt1" tx1="dk1" bg2="lt2" tx2="dk2" accent1="accent1" accent2="accent2" accent3="accent3" accent4="accent4" accent5="accent5" accent6="accent6" hlink="hlink" folHlink="folHlink"/>
   <p:sldLayoutIdLst>
-    <p:sldLayoutId xmlns:r="http://schemas.openxmlformats.org/officeDocument/2006/relationships" id="2147483649" r:id="R5bc187e06c1242ea"/>
+    <p:sldLayoutId xmlns:r="http://schemas.openxmlformats.org/officeDocument/2006/relationships" id="2147483649" r:id="R170b0d1011f34a48"/>
   </p:sldLayoutIdLst>
   <p:txStyles>
     <p:titleStyle>
@@ -1054,10 +1054,10 @@
       </p:grpSpPr>
       <p:sp>
         <p:nvSpPr>
-          <p:cNvPr id="15" name="">
-            <a:extLst xmlns:a="http://schemas.openxmlformats.org/drawingml/2006/main">
-              <a:ext uri="{FF2B5EF4-FFF2-40B4-BE49-F238E27FC236}">
-                <a16:creationId xmlns:a16="http://schemas.microsoft.com/office/drawing/2014/main" id="{5000AF8C-2FEF-460E-870C-9D095FF530DC}"/>
+          <p:cNvPr id="39" name="">
+            <a:extLst xmlns:a="http://schemas.openxmlformats.org/drawingml/2006/main">
+              <a:ext uri="{FF2B5EF4-FFF2-40B4-BE49-F238E27FC236}">
+                <a16:creationId xmlns:a16="http://schemas.microsoft.com/office/drawing/2014/main" id="{11F37E46-287A-4352-8B35-B43C62B71A50}"/>
               </a:ext>
             </a:extLst>
           </p:cNvPr>
@@ -1115,7 +1115,7 @@
           <p:cNvPr id="2" name="">
             <a:extLst xmlns:a="http://schemas.openxmlformats.org/drawingml/2006/main">
               <a:ext uri="{FF2B5EF4-FFF2-40B4-BE49-F238E27FC236}">
-                <a16:creationId xmlns:a16="http://schemas.microsoft.com/office/drawing/2014/main" id="{75B0422B-3C6E-4968-BC26-20444B044865}"/>
+                <a16:creationId xmlns:a16="http://schemas.microsoft.com/office/drawing/2014/main" id="{6443E673-8D16-452E-A58B-87B003364064}"/>
               </a:ext>
             </a:extLst>
           </p:cNvPr>
@@ -1163,35 +1163,35 @@
                 <a:ea typeface="Microsoft YaHei"/>
                 <a:cs typeface="Microsoft YaHei"/>
               </a:rPr>
-              <a:t>转化漏斗</a:t>
+              <a:t>递减转化 · 阶段拆解</a:t>
             </a:r>
           </a:p>
         </p:txBody>
       </p:sp>
       <p:sp>
         <p:nvSpPr>
-          <p:cNvPr id="3" name="">
-            <a:extLst xmlns:a="http://schemas.openxmlformats.org/drawingml/2006/main">
-              <a:ext uri="{FF2B5EF4-FFF2-40B4-BE49-F238E27FC236}">
-                <a16:creationId xmlns:a16="http://schemas.microsoft.com/office/drawing/2014/main" id="{723E72BC-9B6A-49FA-A350-F19D8172E57D}"/>
-              </a:ext>
-            </a:extLst>
-          </p:cNvPr>
-          <p:cNvSpPr>
-            <a:spLocks xmlns:a="http://schemas.openxmlformats.org/drawingml/2006/main" noGrp="1"/>
-          </p:cNvSpPr>
-          <p:nvPr/>
-        </p:nvSpPr>
-        <p:spPr>
-          <a:xfrm xmlns:a="http://schemas.openxmlformats.org/drawingml/2006/main">
-            <a:off x="2000250" y="1428750"/>
-            <a:ext cx="4762500" cy="990600"/>
+          <p:cNvPr id="3" name="PPAGENT_QA|parent=funnel-stage-0|domains=funnel-shape,funnel-content">
+            <a:extLst xmlns:a="http://schemas.openxmlformats.org/drawingml/2006/main">
+              <a:ext uri="{FF2B5EF4-FFF2-40B4-BE49-F238E27FC236}">
+                <a16:creationId xmlns:a16="http://schemas.microsoft.com/office/drawing/2014/main" id="{83C7B3B9-69BB-4647-AF1D-3D1BF0AD9D07}"/>
+              </a:ext>
+            </a:extLst>
+          </p:cNvPr>
+          <p:cNvSpPr>
+            <a:spLocks xmlns:a="http://schemas.openxmlformats.org/drawingml/2006/main" noGrp="1"/>
+          </p:cNvSpPr>
+          <p:nvPr/>
+        </p:nvSpPr>
+        <p:spPr>
+          <a:xfrm xmlns:a="http://schemas.openxmlformats.org/drawingml/2006/main">
+            <a:off x="685800" y="1524000"/>
+            <a:ext cx="5334000" cy="1000125"/>
           </a:xfrm>
           <a:prstGeom xmlns:a="http://schemas.openxmlformats.org/drawingml/2006/main" prst="trapezoid">
             <a:avLst/>
           </a:prstGeom>
           <a:solidFill xmlns:a="http://schemas.openxmlformats.org/drawingml/2006/main">
-            <a:srgbClr val="1677C8"/>
+            <a:srgbClr val="174B82"/>
           </a:solidFill>
           <a:ln xmlns:a="http://schemas.openxmlformats.org/drawingml/2006/main" w="19050">
             <a:solidFill>
@@ -1203,19 +1203,81 @@
         <p:style>
           <a:lnRef xmlns:a="http://schemas.openxmlformats.org/drawingml/2006/main" idx="0"/>
           <a:fillRef xmlns:a="http://schemas.openxmlformats.org/drawingml/2006/main" idx="0"/>
-          <a:effectRef xmlns:a="http://schemas.openxmlformats.org/drawingml/2006/main" idx="6"/>
+          <a:effectRef xmlns:a="http://schemas.openxmlformats.org/drawingml/2006/main" idx="4"/>
           <a:fontRef xmlns:a="http://schemas.openxmlformats.org/drawingml/2006/main" idx="major"/>
         </p:style>
+      </p:sp>
+      <p:sp>
+        <p:nvSpPr>
+          <p:cNvPr id="4" name="">
+            <a:extLst xmlns:a="http://schemas.openxmlformats.org/drawingml/2006/main">
+              <a:ext uri="{FF2B5EF4-FFF2-40B4-BE49-F238E27FC236}">
+                <a16:creationId xmlns:a16="http://schemas.microsoft.com/office/drawing/2014/main" id="{96AFC61F-2155-43FB-8A7B-CCED7C3ED2FD}"/>
+              </a:ext>
+            </a:extLst>
+          </p:cNvPr>
+          <p:cNvSpPr>
+            <a:spLocks xmlns:a="http://schemas.openxmlformats.org/drawingml/2006/main" noGrp="1"/>
+          </p:cNvSpPr>
+          <p:nvPr/>
+        </p:nvSpPr>
+        <p:spPr>
+          <a:xfrm xmlns:a="http://schemas.openxmlformats.org/drawingml/2006/main">
+            <a:off x="723900" y="1476375"/>
+            <a:ext cx="5257800" cy="209550"/>
+          </a:xfrm>
+          <a:prstGeom xmlns:a="http://schemas.openxmlformats.org/drawingml/2006/main" prst="ellipse">
+            <a:avLst/>
+          </a:prstGeom>
+          <a:solidFill xmlns:a="http://schemas.openxmlformats.org/drawingml/2006/main">
+            <a:srgbClr val="174B82"/>
+          </a:solidFill>
+          <a:ln xmlns:a="http://schemas.openxmlformats.org/drawingml/2006/main" w="9525">
+            <a:solidFill>
+              <a:srgbClr val="FFFFFF"/>
+            </a:solidFill>
+            <a:prstDash val="solid"/>
+          </a:ln>
+        </p:spPr>
+      </p:sp>
+      <p:sp>
+        <p:nvSpPr>
+          <p:cNvPr id="5" name="">
+            <a:extLst xmlns:a="http://schemas.openxmlformats.org/drawingml/2006/main">
+              <a:ext uri="{FF2B5EF4-FFF2-40B4-BE49-F238E27FC236}">
+                <a16:creationId xmlns:a16="http://schemas.microsoft.com/office/drawing/2014/main" id="{B720D048-B2CD-4888-84EC-1F57E009C050}"/>
+              </a:ext>
+            </a:extLst>
+          </p:cNvPr>
+          <p:cNvSpPr>
+            <a:spLocks xmlns:a="http://schemas.openxmlformats.org/drawingml/2006/main" noGrp="1"/>
+          </p:cNvSpPr>
+          <p:nvPr/>
+        </p:nvSpPr>
+        <p:spPr>
+          <a:xfrm xmlns:a="http://schemas.openxmlformats.org/drawingml/2006/main">
+            <a:off x="838200" y="1619250"/>
+            <a:ext cx="5029200" cy="276225"/>
+          </a:xfrm>
+          <a:prstGeom xmlns:a="http://schemas.openxmlformats.org/drawingml/2006/main" prst="rect">
+            <a:avLst/>
+          </a:prstGeom>
+          <a:noFill xmlns:a="http://schemas.openxmlformats.org/drawingml/2006/main"/>
+          <a:ln xmlns:a="http://schemas.openxmlformats.org/drawingml/2006/main" w="0">
+            <a:noFill/>
+            <a:prstDash val="solid"/>
+          </a:ln>
+        </p:spPr>
         <p:txBody>
-          <a:bodyPr xmlns:a="http://schemas.openxmlformats.org/drawingml/2006/main" lIns="114300" tIns="76200" rIns="114300" bIns="76200" anchor="ctr">
+          <a:bodyPr xmlns:a="http://schemas.openxmlformats.org/drawingml/2006/main" lIns="0" tIns="0" rIns="0" bIns="0" anchor="ctr">
             <a:normAutofit fontScale="100000"/>
           </a:bodyPr>
           <a:lstStyle xmlns:a="http://schemas.openxmlformats.org/drawingml/2006/main"/>
           <a:p xmlns:a="http://schemas.openxmlformats.org/drawingml/2006/main">
             <a:pPr algn="ctr">
-              <a:defRPr sz="1650" b="1">
-                <a:solidFill>
-                  <a:srgbClr val="FFFFFF"/>
+              <a:defRPr sz="1800" b="1">
+                <a:solidFill>
+                  <a:srgbClr val="F6C96A"/>
                 </a:solidFill>
                 <a:latin typeface="Microsoft YaHei"/>
                 <a:ea typeface="Microsoft YaHei"/>
@@ -1223,9 +1285,9 @@
               </a:defRPr>
             </a:pPr>
             <a:r>
-              <a:rPr sz="1650" b="1">
-                <a:solidFill>
-                  <a:srgbClr val="FFFFFF"/>
+              <a:rPr sz="1800" b="1">
+                <a:solidFill>
+                  <a:srgbClr val="F6C96A"/>
                 </a:solidFill>
                 <a:latin typeface="Microsoft YaHei"/>
                 <a:ea typeface="Microsoft YaHei"/>
@@ -1234,9 +1296,44 @@
               <a:t>100%</a:t>
             </a:r>
           </a:p>
+        </p:txBody>
+      </p:sp>
+      <p:sp>
+        <p:nvSpPr>
+          <p:cNvPr id="6" name="">
+            <a:extLst xmlns:a="http://schemas.openxmlformats.org/drawingml/2006/main">
+              <a:ext uri="{FF2B5EF4-FFF2-40B4-BE49-F238E27FC236}">
+                <a16:creationId xmlns:a16="http://schemas.microsoft.com/office/drawing/2014/main" id="{3C12CDB3-79ED-429C-850F-9E6874545C55}"/>
+              </a:ext>
+            </a:extLst>
+          </p:cNvPr>
+          <p:cNvSpPr>
+            <a:spLocks xmlns:a="http://schemas.openxmlformats.org/drawingml/2006/main" noGrp="1"/>
+          </p:cNvSpPr>
+          <p:nvPr/>
+        </p:nvSpPr>
+        <p:spPr>
+          <a:xfrm xmlns:a="http://schemas.openxmlformats.org/drawingml/2006/main">
+            <a:off x="838200" y="1885950"/>
+            <a:ext cx="5029200" cy="295275"/>
+          </a:xfrm>
+          <a:prstGeom xmlns:a="http://schemas.openxmlformats.org/drawingml/2006/main" prst="rect">
+            <a:avLst/>
+          </a:prstGeom>
+          <a:noFill xmlns:a="http://schemas.openxmlformats.org/drawingml/2006/main"/>
+          <a:ln xmlns:a="http://schemas.openxmlformats.org/drawingml/2006/main" w="0">
+            <a:noFill/>
+            <a:prstDash val="solid"/>
+          </a:ln>
+        </p:spPr>
+        <p:txBody>
+          <a:bodyPr xmlns:a="http://schemas.openxmlformats.org/drawingml/2006/main" lIns="0" tIns="0" rIns="0" bIns="0" anchor="ctr">
+            <a:normAutofit fontScale="100000"/>
+          </a:bodyPr>
+          <a:lstStyle xmlns:a="http://schemas.openxmlformats.org/drawingml/2006/main"/>
           <a:p xmlns:a="http://schemas.openxmlformats.org/drawingml/2006/main">
             <a:pPr algn="ctr">
-              <a:defRPr sz="1650" b="1">
+              <a:defRPr sz="1500" b="1">
                 <a:solidFill>
                   <a:srgbClr val="FFFFFF"/>
                 </a:solidFill>
@@ -1246,7 +1343,7 @@
               </a:defRPr>
             </a:pPr>
             <a:r>
-              <a:rPr sz="1650" b="1">
+              <a:rPr sz="1500" b="1">
                 <a:solidFill>
                   <a:srgbClr val="FFFFFF"/>
                 </a:solidFill>
@@ -1254,29 +1351,97 @@
                 <a:ea typeface="Microsoft YaHei"/>
                 <a:cs typeface="Microsoft YaHei"/>
               </a:rPr>
-              <a:t>触达</a:t>
+              <a:t>收到稿件</a:t>
             </a:r>
           </a:p>
         </p:txBody>
       </p:sp>
       <p:sp>
         <p:nvSpPr>
-          <p:cNvPr id="4" name="">
-            <a:extLst xmlns:a="http://schemas.openxmlformats.org/drawingml/2006/main">
-              <a:ext uri="{FF2B5EF4-FFF2-40B4-BE49-F238E27FC236}">
-                <a16:creationId xmlns:a16="http://schemas.microsoft.com/office/drawing/2014/main" id="{19F48E63-B272-4FCD-AFC9-4E4AE66BDE7B}"/>
-              </a:ext>
-            </a:extLst>
-          </p:cNvPr>
-          <p:cNvSpPr>
-            <a:spLocks xmlns:a="http://schemas.openxmlformats.org/drawingml/2006/main" noGrp="1"/>
-          </p:cNvSpPr>
-          <p:nvPr/>
-        </p:nvSpPr>
-        <p:spPr>
-          <a:xfrm xmlns:a="http://schemas.openxmlformats.org/drawingml/2006/main">
-            <a:off x="7239000" y="1562100"/>
-            <a:ext cx="4000500" cy="723900"/>
+          <p:cNvPr id="7" name="PPAGENT_QA|parent=funnel-note-0|domains=funnel-note,funnel-content">
+            <a:extLst xmlns:a="http://schemas.openxmlformats.org/drawingml/2006/main">
+              <a:ext uri="{FF2B5EF4-FFF2-40B4-BE49-F238E27FC236}">
+                <a16:creationId xmlns:a16="http://schemas.microsoft.com/office/drawing/2014/main" id="{40EF4887-49C5-490B-A0B7-2FB7BFE7B2D9}"/>
+              </a:ext>
+            </a:extLst>
+          </p:cNvPr>
+          <p:cNvSpPr>
+            <a:spLocks xmlns:a="http://schemas.openxmlformats.org/drawingml/2006/main" noGrp="1"/>
+          </p:cNvSpPr>
+          <p:nvPr/>
+        </p:nvSpPr>
+        <p:spPr>
+          <a:xfrm xmlns:a="http://schemas.openxmlformats.org/drawingml/2006/main">
+            <a:off x="6915150" y="1533525"/>
+            <a:ext cx="4552950" cy="981075"/>
+          </a:xfrm>
+          <a:prstGeom xmlns:a="http://schemas.openxmlformats.org/drawingml/2006/main" prst="roundRect">
+            <a:avLst>
+              <a:gd name="adj" fmla="val 11650"/>
+            </a:avLst>
+          </a:prstGeom>
+          <a:solidFill xmlns:a="http://schemas.openxmlformats.org/drawingml/2006/main">
+            <a:srgbClr val="FFFFFF"/>
+          </a:solidFill>
+          <a:ln xmlns:a="http://schemas.openxmlformats.org/drawingml/2006/main" w="9525">
+            <a:solidFill>
+              <a:srgbClr val="D8E5EF"/>
+            </a:solidFill>
+            <a:prstDash val="solid"/>
+          </a:ln>
+        </p:spPr>
+      </p:sp>
+      <p:sp>
+        <p:nvSpPr>
+          <p:cNvPr id="8" name="">
+            <a:extLst xmlns:a="http://schemas.openxmlformats.org/drawingml/2006/main">
+              <a:ext uri="{FF2B5EF4-FFF2-40B4-BE49-F238E27FC236}">
+                <a16:creationId xmlns:a16="http://schemas.microsoft.com/office/drawing/2014/main" id="{9708A00B-B3C4-4471-A762-E68A46BE1DC4}"/>
+              </a:ext>
+            </a:extLst>
+          </p:cNvPr>
+          <p:cNvSpPr>
+            <a:spLocks xmlns:a="http://schemas.openxmlformats.org/drawingml/2006/main" noGrp="1"/>
+          </p:cNvSpPr>
+          <p:nvPr/>
+        </p:nvSpPr>
+        <p:spPr>
+          <a:xfrm xmlns:a="http://schemas.openxmlformats.org/drawingml/2006/main">
+            <a:off x="6915150" y="1533525"/>
+            <a:ext cx="57150" cy="981075"/>
+          </a:xfrm>
+          <a:prstGeom xmlns:a="http://schemas.openxmlformats.org/drawingml/2006/main" prst="roundRect">
+            <a:avLst>
+              <a:gd name="adj" fmla="val 33333"/>
+            </a:avLst>
+          </a:prstGeom>
+          <a:solidFill xmlns:a="http://schemas.openxmlformats.org/drawingml/2006/main">
+            <a:srgbClr val="174B82"/>
+          </a:solidFill>
+          <a:ln xmlns:a="http://schemas.openxmlformats.org/drawingml/2006/main" w="0">
+            <a:noFill/>
+            <a:prstDash val="solid"/>
+          </a:ln>
+        </p:spPr>
+      </p:sp>
+      <p:sp>
+        <p:nvSpPr>
+          <p:cNvPr id="9" name="">
+            <a:extLst xmlns:a="http://schemas.openxmlformats.org/drawingml/2006/main">
+              <a:ext uri="{FF2B5EF4-FFF2-40B4-BE49-F238E27FC236}">
+                <a16:creationId xmlns:a16="http://schemas.microsoft.com/office/drawing/2014/main" id="{DED397BD-AA70-4D95-B19B-E00A76C71C19}"/>
+              </a:ext>
+            </a:extLst>
+          </p:cNvPr>
+          <p:cNvSpPr>
+            <a:spLocks xmlns:a="http://schemas.openxmlformats.org/drawingml/2006/main" noGrp="1"/>
+          </p:cNvSpPr>
+          <p:nvPr/>
+        </p:nvSpPr>
+        <p:spPr>
+          <a:xfrm xmlns:a="http://schemas.openxmlformats.org/drawingml/2006/main">
+            <a:off x="7162800" y="1628775"/>
+            <a:ext cx="4000500" cy="257175"/>
           </a:xfrm>
           <a:prstGeom xmlns:a="http://schemas.openxmlformats.org/drawingml/2006/main" prst="rect">
             <a:avLst/>
@@ -1294,9 +1459,9 @@
           <a:lstStyle xmlns:a="http://schemas.openxmlformats.org/drawingml/2006/main"/>
           <a:p xmlns:a="http://schemas.openxmlformats.org/drawingml/2006/main">
             <a:pPr algn="l">
-              <a:defRPr sz="1350" b="0">
-                <a:solidFill>
-                  <a:srgbClr val="475569"/>
+              <a:defRPr sz="1350" b="1">
+                <a:solidFill>
+                  <a:srgbClr val="1677C8"/>
                 </a:solidFill>
                 <a:latin typeface="Microsoft YaHei"/>
                 <a:ea typeface="Microsoft YaHei"/>
@@ -1304,45 +1469,103 @@
               </a:defRPr>
             </a:pPr>
             <a:r>
-              <a:rPr sz="1350" b="0">
-                <a:solidFill>
-                  <a:srgbClr val="475569"/>
+              <a:rPr sz="1350" b="1">
+                <a:solidFill>
+                  <a:srgbClr val="1677C8"/>
                 </a:solidFill>
                 <a:latin typeface="Microsoft YaHei"/>
                 <a:ea typeface="Microsoft YaHei"/>
                 <a:cs typeface="Microsoft YaHei"/>
               </a:rPr>
-              <a:t>第一阶段说明与关键观察</a:t>
+              <a:t>01  收到稿件</a:t>
             </a:r>
           </a:p>
         </p:txBody>
       </p:sp>
       <p:sp>
         <p:nvSpPr>
-          <p:cNvPr id="5" name="">
-            <a:extLst xmlns:a="http://schemas.openxmlformats.org/drawingml/2006/main">
-              <a:ext uri="{FF2B5EF4-FFF2-40B4-BE49-F238E27FC236}">
-                <a16:creationId xmlns:a16="http://schemas.microsoft.com/office/drawing/2014/main" id="{E51561AF-4926-48F5-B9DD-502CB745AFE6}"/>
-              </a:ext>
-            </a:extLst>
-          </p:cNvPr>
-          <p:cNvSpPr>
-            <a:spLocks xmlns:a="http://schemas.openxmlformats.org/drawingml/2006/main" noGrp="1"/>
-          </p:cNvSpPr>
-          <p:nvPr/>
-        </p:nvSpPr>
-        <p:spPr>
-          <a:xfrm xmlns:a="http://schemas.openxmlformats.org/drawingml/2006/main">
-            <a:off x="6915150" y="1924050"/>
-            <a:ext cx="1143000" cy="0"/>
+          <p:cNvPr id="10" name="">
+            <a:extLst xmlns:a="http://schemas.openxmlformats.org/drawingml/2006/main">
+              <a:ext uri="{FF2B5EF4-FFF2-40B4-BE49-F238E27FC236}">
+                <a16:creationId xmlns:a16="http://schemas.microsoft.com/office/drawing/2014/main" id="{2FD155CF-7580-4C97-8DFA-2DBC5F7B9D9C}"/>
+              </a:ext>
+            </a:extLst>
+          </p:cNvPr>
+          <p:cNvSpPr>
+            <a:spLocks xmlns:a="http://schemas.openxmlformats.org/drawingml/2006/main" noGrp="1"/>
+          </p:cNvSpPr>
+          <p:nvPr/>
+        </p:nvSpPr>
+        <p:spPr>
+          <a:xfrm xmlns:a="http://schemas.openxmlformats.org/drawingml/2006/main">
+            <a:off x="7162800" y="1895475"/>
+            <a:ext cx="4000500" cy="581025"/>
+          </a:xfrm>
+          <a:prstGeom xmlns:a="http://schemas.openxmlformats.org/drawingml/2006/main" prst="rect">
+            <a:avLst/>
+          </a:prstGeom>
+          <a:noFill xmlns:a="http://schemas.openxmlformats.org/drawingml/2006/main"/>
+          <a:ln xmlns:a="http://schemas.openxmlformats.org/drawingml/2006/main" w="0">
+            <a:noFill/>
+            <a:prstDash val="solid"/>
+          </a:ln>
+        </p:spPr>
+        <p:txBody>
+          <a:bodyPr xmlns:a="http://schemas.openxmlformats.org/drawingml/2006/main" lIns="0" tIns="0" rIns="0" bIns="0" anchor="t">
+            <a:normAutofit fontScale="100000"/>
+          </a:bodyPr>
+          <a:lstStyle xmlns:a="http://schemas.openxmlformats.org/drawingml/2006/main"/>
+          <a:p xmlns:a="http://schemas.openxmlformats.org/drawingml/2006/main">
+            <a:pPr algn="l">
+              <a:defRPr sz="1200" b="0">
+                <a:solidFill>
+                  <a:srgbClr val="475569"/>
+                </a:solidFill>
+                <a:latin typeface="Microsoft YaHei"/>
+                <a:ea typeface="Microsoft YaHei"/>
+                <a:cs typeface="Microsoft YaHei"/>
+              </a:defRPr>
+            </a:pPr>
+            <a:r>
+              <a:rPr sz="1200" b="0">
+                <a:solidFill>
+                  <a:srgbClr val="475569"/>
+                </a:solidFill>
+                <a:latin typeface="Microsoft YaHei"/>
+                <a:ea typeface="Microsoft YaHei"/>
+                <a:cs typeface="Microsoft YaHei"/>
+              </a:rPr>
+              <a:t>原始信息完整进入处理流程，保留来源锚点</a:t>
+            </a:r>
+          </a:p>
+        </p:txBody>
+      </p:sp>
+      <p:sp>
+        <p:nvSpPr>
+          <p:cNvPr id="11" name="">
+            <a:extLst xmlns:a="http://schemas.openxmlformats.org/drawingml/2006/main">
+              <a:ext uri="{FF2B5EF4-FFF2-40B4-BE49-F238E27FC236}">
+                <a16:creationId xmlns:a16="http://schemas.microsoft.com/office/drawing/2014/main" id="{380DBFA7-6EC9-45A1-AF08-037129BBD97F}"/>
+              </a:ext>
+            </a:extLst>
+          </p:cNvPr>
+          <p:cNvSpPr>
+            <a:spLocks xmlns:a="http://schemas.openxmlformats.org/drawingml/2006/main" noGrp="1"/>
+          </p:cNvSpPr>
+          <p:nvPr/>
+        </p:nvSpPr>
+        <p:spPr>
+          <a:xfrm xmlns:a="http://schemas.openxmlformats.org/drawingml/2006/main">
+            <a:off x="6115050" y="2024063"/>
+            <a:ext cx="781050" cy="0"/>
           </a:xfrm>
           <a:prstGeom xmlns:a="http://schemas.openxmlformats.org/drawingml/2006/main" prst="line">
             <a:avLst/>
           </a:prstGeom>
           <a:noFill xmlns:a="http://schemas.openxmlformats.org/drawingml/2006/main"/>
-          <a:ln xmlns:a="http://schemas.openxmlformats.org/drawingml/2006/main" w="14288">
+          <a:ln xmlns:a="http://schemas.openxmlformats.org/drawingml/2006/main" w="12383">
             <a:solidFill>
-              <a:srgbClr val="00A8D8"/>
+              <a:srgbClr val="91B8D7"/>
             </a:solidFill>
             <a:prstDash val="dash"/>
           </a:ln>
@@ -1350,28 +1573,28 @@
       </p:sp>
       <p:sp>
         <p:nvSpPr>
-          <p:cNvPr id="6" name="">
-            <a:extLst xmlns:a="http://schemas.openxmlformats.org/drawingml/2006/main">
-              <a:ext uri="{FF2B5EF4-FFF2-40B4-BE49-F238E27FC236}">
-                <a16:creationId xmlns:a16="http://schemas.microsoft.com/office/drawing/2014/main" id="{20635DF1-B260-4FFC-9265-FE3C0FCC272C}"/>
-              </a:ext>
-            </a:extLst>
-          </p:cNvPr>
-          <p:cNvSpPr>
-            <a:spLocks xmlns:a="http://schemas.openxmlformats.org/drawingml/2006/main" noGrp="1"/>
-          </p:cNvSpPr>
-          <p:nvPr/>
-        </p:nvSpPr>
-        <p:spPr>
-          <a:xfrm xmlns:a="http://schemas.openxmlformats.org/drawingml/2006/main">
-            <a:off x="2524125" y="2533650"/>
-            <a:ext cx="3714750" cy="990600"/>
+          <p:cNvPr id="12" name="PPAGENT_QA|parent=funnel-stage-1|domains=funnel-shape,funnel-content">
+            <a:extLst xmlns:a="http://schemas.openxmlformats.org/drawingml/2006/main">
+              <a:ext uri="{FF2B5EF4-FFF2-40B4-BE49-F238E27FC236}">
+                <a16:creationId xmlns:a16="http://schemas.microsoft.com/office/drawing/2014/main" id="{C73854B6-B264-44B6-B573-04F3642E1576}"/>
+              </a:ext>
+            </a:extLst>
+          </p:cNvPr>
+          <p:cNvSpPr>
+            <a:spLocks xmlns:a="http://schemas.openxmlformats.org/drawingml/2006/main" noGrp="1"/>
+          </p:cNvSpPr>
+          <p:nvPr/>
+        </p:nvSpPr>
+        <p:spPr>
+          <a:xfrm xmlns:a="http://schemas.openxmlformats.org/drawingml/2006/main">
+            <a:off x="1209675" y="2600325"/>
+            <a:ext cx="4286250" cy="1000125"/>
           </a:xfrm>
           <a:prstGeom xmlns:a="http://schemas.openxmlformats.org/drawingml/2006/main" prst="trapezoid">
             <a:avLst/>
           </a:prstGeom>
           <a:solidFill xmlns:a="http://schemas.openxmlformats.org/drawingml/2006/main">
-            <a:srgbClr val="00A8D8"/>
+            <a:srgbClr val="1767A5"/>
           </a:solidFill>
           <a:ln xmlns:a="http://schemas.openxmlformats.org/drawingml/2006/main" w="19050">
             <a:solidFill>
@@ -1383,19 +1606,81 @@
         <p:style>
           <a:lnRef xmlns:a="http://schemas.openxmlformats.org/drawingml/2006/main" idx="0"/>
           <a:fillRef xmlns:a="http://schemas.openxmlformats.org/drawingml/2006/main" idx="0"/>
-          <a:effectRef xmlns:a="http://schemas.openxmlformats.org/drawingml/2006/main" idx="6"/>
+          <a:effectRef xmlns:a="http://schemas.openxmlformats.org/drawingml/2006/main" idx="4"/>
           <a:fontRef xmlns:a="http://schemas.openxmlformats.org/drawingml/2006/main" idx="major"/>
         </p:style>
+      </p:sp>
+      <p:sp>
+        <p:nvSpPr>
+          <p:cNvPr id="13" name="">
+            <a:extLst xmlns:a="http://schemas.openxmlformats.org/drawingml/2006/main">
+              <a:ext uri="{FF2B5EF4-FFF2-40B4-BE49-F238E27FC236}">
+                <a16:creationId xmlns:a16="http://schemas.microsoft.com/office/drawing/2014/main" id="{C1C3CFF8-1912-4CFE-A106-AEDC8C01903B}"/>
+              </a:ext>
+            </a:extLst>
+          </p:cNvPr>
+          <p:cNvSpPr>
+            <a:spLocks xmlns:a="http://schemas.openxmlformats.org/drawingml/2006/main" noGrp="1"/>
+          </p:cNvSpPr>
+          <p:nvPr/>
+        </p:nvSpPr>
+        <p:spPr>
+          <a:xfrm xmlns:a="http://schemas.openxmlformats.org/drawingml/2006/main">
+            <a:off x="1247775" y="2552700"/>
+            <a:ext cx="4210050" cy="209550"/>
+          </a:xfrm>
+          <a:prstGeom xmlns:a="http://schemas.openxmlformats.org/drawingml/2006/main" prst="ellipse">
+            <a:avLst/>
+          </a:prstGeom>
+          <a:solidFill xmlns:a="http://schemas.openxmlformats.org/drawingml/2006/main">
+            <a:srgbClr val="1767A5"/>
+          </a:solidFill>
+          <a:ln xmlns:a="http://schemas.openxmlformats.org/drawingml/2006/main" w="9525">
+            <a:solidFill>
+              <a:srgbClr val="FFFFFF"/>
+            </a:solidFill>
+            <a:prstDash val="solid"/>
+          </a:ln>
+        </p:spPr>
+      </p:sp>
+      <p:sp>
+        <p:nvSpPr>
+          <p:cNvPr id="14" name="">
+            <a:extLst xmlns:a="http://schemas.openxmlformats.org/drawingml/2006/main">
+              <a:ext uri="{FF2B5EF4-FFF2-40B4-BE49-F238E27FC236}">
+                <a16:creationId xmlns:a16="http://schemas.microsoft.com/office/drawing/2014/main" id="{F78BF3B0-F439-42AF-AC3B-D92AA1513888}"/>
+              </a:ext>
+            </a:extLst>
+          </p:cNvPr>
+          <p:cNvSpPr>
+            <a:spLocks xmlns:a="http://schemas.openxmlformats.org/drawingml/2006/main" noGrp="1"/>
+          </p:cNvSpPr>
+          <p:nvPr/>
+        </p:nvSpPr>
+        <p:spPr>
+          <a:xfrm xmlns:a="http://schemas.openxmlformats.org/drawingml/2006/main">
+            <a:off x="1362075" y="2695575"/>
+            <a:ext cx="3981450" cy="276225"/>
+          </a:xfrm>
+          <a:prstGeom xmlns:a="http://schemas.openxmlformats.org/drawingml/2006/main" prst="rect">
+            <a:avLst/>
+          </a:prstGeom>
+          <a:noFill xmlns:a="http://schemas.openxmlformats.org/drawingml/2006/main"/>
+          <a:ln xmlns:a="http://schemas.openxmlformats.org/drawingml/2006/main" w="0">
+            <a:noFill/>
+            <a:prstDash val="solid"/>
+          </a:ln>
+        </p:spPr>
         <p:txBody>
-          <a:bodyPr xmlns:a="http://schemas.openxmlformats.org/drawingml/2006/main" lIns="114300" tIns="76200" rIns="114300" bIns="76200" anchor="ctr">
+          <a:bodyPr xmlns:a="http://schemas.openxmlformats.org/drawingml/2006/main" lIns="0" tIns="0" rIns="0" bIns="0" anchor="ctr">
             <a:normAutofit fontScale="100000"/>
           </a:bodyPr>
           <a:lstStyle xmlns:a="http://schemas.openxmlformats.org/drawingml/2006/main"/>
           <a:p xmlns:a="http://schemas.openxmlformats.org/drawingml/2006/main">
             <a:pPr algn="ctr">
-              <a:defRPr sz="1650" b="1">
-                <a:solidFill>
-                  <a:srgbClr val="FFFFFF"/>
+              <a:defRPr sz="1800" b="1">
+                <a:solidFill>
+                  <a:srgbClr val="F6C96A"/>
                 </a:solidFill>
                 <a:latin typeface="Microsoft YaHei"/>
                 <a:ea typeface="Microsoft YaHei"/>
@@ -1403,20 +1688,55 @@
               </a:defRPr>
             </a:pPr>
             <a:r>
-              <a:rPr sz="1650" b="1">
-                <a:solidFill>
-                  <a:srgbClr val="FFFFFF"/>
+              <a:rPr sz="1800" b="1">
+                <a:solidFill>
+                  <a:srgbClr val="F6C96A"/>
                 </a:solidFill>
                 <a:latin typeface="Microsoft YaHei"/>
                 <a:ea typeface="Microsoft YaHei"/>
                 <a:cs typeface="Microsoft YaHei"/>
               </a:rPr>
-              <a:t>72%</a:t>
+              <a:t>78%</a:t>
             </a:r>
           </a:p>
+        </p:txBody>
+      </p:sp>
+      <p:sp>
+        <p:nvSpPr>
+          <p:cNvPr id="15" name="">
+            <a:extLst xmlns:a="http://schemas.openxmlformats.org/drawingml/2006/main">
+              <a:ext uri="{FF2B5EF4-FFF2-40B4-BE49-F238E27FC236}">
+                <a16:creationId xmlns:a16="http://schemas.microsoft.com/office/drawing/2014/main" id="{FB10C9D4-7977-402E-9948-F2D4FE6C112B}"/>
+              </a:ext>
+            </a:extLst>
+          </p:cNvPr>
+          <p:cNvSpPr>
+            <a:spLocks xmlns:a="http://schemas.openxmlformats.org/drawingml/2006/main" noGrp="1"/>
+          </p:cNvSpPr>
+          <p:nvPr/>
+        </p:nvSpPr>
+        <p:spPr>
+          <a:xfrm xmlns:a="http://schemas.openxmlformats.org/drawingml/2006/main">
+            <a:off x="1362075" y="2962275"/>
+            <a:ext cx="3981450" cy="295275"/>
+          </a:xfrm>
+          <a:prstGeom xmlns:a="http://schemas.openxmlformats.org/drawingml/2006/main" prst="rect">
+            <a:avLst/>
+          </a:prstGeom>
+          <a:noFill xmlns:a="http://schemas.openxmlformats.org/drawingml/2006/main"/>
+          <a:ln xmlns:a="http://schemas.openxmlformats.org/drawingml/2006/main" w="0">
+            <a:noFill/>
+            <a:prstDash val="solid"/>
+          </a:ln>
+        </p:spPr>
+        <p:txBody>
+          <a:bodyPr xmlns:a="http://schemas.openxmlformats.org/drawingml/2006/main" lIns="0" tIns="0" rIns="0" bIns="0" anchor="ctr">
+            <a:normAutofit fontScale="100000"/>
+          </a:bodyPr>
+          <a:lstStyle xmlns:a="http://schemas.openxmlformats.org/drawingml/2006/main"/>
           <a:p xmlns:a="http://schemas.openxmlformats.org/drawingml/2006/main">
             <a:pPr algn="ctr">
-              <a:defRPr sz="1650" b="1">
+              <a:defRPr sz="1500" b="1">
                 <a:solidFill>
                   <a:srgbClr val="FFFFFF"/>
                 </a:solidFill>
@@ -1426,7 +1746,7 @@
               </a:defRPr>
             </a:pPr>
             <a:r>
-              <a:rPr sz="1650" b="1">
+              <a:rPr sz="1500" b="1">
                 <a:solidFill>
                   <a:srgbClr val="FFFFFF"/>
                 </a:solidFill>
@@ -1434,29 +1754,97 @@
                 <a:ea typeface="Microsoft YaHei"/>
                 <a:cs typeface="Microsoft YaHei"/>
               </a:rPr>
-              <a:t>兴趣</a:t>
+              <a:t>形成页面</a:t>
             </a:r>
           </a:p>
         </p:txBody>
       </p:sp>
       <p:sp>
         <p:nvSpPr>
-          <p:cNvPr id="7" name="">
-            <a:extLst xmlns:a="http://schemas.openxmlformats.org/drawingml/2006/main">
-              <a:ext uri="{FF2B5EF4-FFF2-40B4-BE49-F238E27FC236}">
-                <a16:creationId xmlns:a16="http://schemas.microsoft.com/office/drawing/2014/main" id="{61F07765-434E-4FB8-B256-96CAAEEFDF0E}"/>
-              </a:ext>
-            </a:extLst>
-          </p:cNvPr>
-          <p:cNvSpPr>
-            <a:spLocks xmlns:a="http://schemas.openxmlformats.org/drawingml/2006/main" noGrp="1"/>
-          </p:cNvSpPr>
-          <p:nvPr/>
-        </p:nvSpPr>
-        <p:spPr>
-          <a:xfrm xmlns:a="http://schemas.openxmlformats.org/drawingml/2006/main">
-            <a:off x="7239000" y="2667000"/>
-            <a:ext cx="4000500" cy="723900"/>
+          <p:cNvPr id="16" name="PPAGENT_QA|parent=funnel-note-1|domains=funnel-note,funnel-content">
+            <a:extLst xmlns:a="http://schemas.openxmlformats.org/drawingml/2006/main">
+              <a:ext uri="{FF2B5EF4-FFF2-40B4-BE49-F238E27FC236}">
+                <a16:creationId xmlns:a16="http://schemas.microsoft.com/office/drawing/2014/main" id="{C09DB0D7-C9D8-4F58-B040-D640F20785FF}"/>
+              </a:ext>
+            </a:extLst>
+          </p:cNvPr>
+          <p:cNvSpPr>
+            <a:spLocks xmlns:a="http://schemas.openxmlformats.org/drawingml/2006/main" noGrp="1"/>
+          </p:cNvSpPr>
+          <p:nvPr/>
+        </p:nvSpPr>
+        <p:spPr>
+          <a:xfrm xmlns:a="http://schemas.openxmlformats.org/drawingml/2006/main">
+            <a:off x="6915150" y="2609850"/>
+            <a:ext cx="4552950" cy="981075"/>
+          </a:xfrm>
+          <a:prstGeom xmlns:a="http://schemas.openxmlformats.org/drawingml/2006/main" prst="roundRect">
+            <a:avLst>
+              <a:gd name="adj" fmla="val 11650"/>
+            </a:avLst>
+          </a:prstGeom>
+          <a:solidFill xmlns:a="http://schemas.openxmlformats.org/drawingml/2006/main">
+            <a:srgbClr val="F7FAFC"/>
+          </a:solidFill>
+          <a:ln xmlns:a="http://schemas.openxmlformats.org/drawingml/2006/main" w="9525">
+            <a:solidFill>
+              <a:srgbClr val="D8E5EF"/>
+            </a:solidFill>
+            <a:prstDash val="solid"/>
+          </a:ln>
+        </p:spPr>
+      </p:sp>
+      <p:sp>
+        <p:nvSpPr>
+          <p:cNvPr id="17" name="">
+            <a:extLst xmlns:a="http://schemas.openxmlformats.org/drawingml/2006/main">
+              <a:ext uri="{FF2B5EF4-FFF2-40B4-BE49-F238E27FC236}">
+                <a16:creationId xmlns:a16="http://schemas.microsoft.com/office/drawing/2014/main" id="{069DD6A9-107D-42A7-A22B-8E8CED18B301}"/>
+              </a:ext>
+            </a:extLst>
+          </p:cNvPr>
+          <p:cNvSpPr>
+            <a:spLocks xmlns:a="http://schemas.openxmlformats.org/drawingml/2006/main" noGrp="1"/>
+          </p:cNvSpPr>
+          <p:nvPr/>
+        </p:nvSpPr>
+        <p:spPr>
+          <a:xfrm xmlns:a="http://schemas.openxmlformats.org/drawingml/2006/main">
+            <a:off x="6915150" y="2609850"/>
+            <a:ext cx="57150" cy="981075"/>
+          </a:xfrm>
+          <a:prstGeom xmlns:a="http://schemas.openxmlformats.org/drawingml/2006/main" prst="roundRect">
+            <a:avLst>
+              <a:gd name="adj" fmla="val 33333"/>
+            </a:avLst>
+          </a:prstGeom>
+          <a:solidFill xmlns:a="http://schemas.openxmlformats.org/drawingml/2006/main">
+            <a:srgbClr val="1767A5"/>
+          </a:solidFill>
+          <a:ln xmlns:a="http://schemas.openxmlformats.org/drawingml/2006/main" w="0">
+            <a:noFill/>
+            <a:prstDash val="solid"/>
+          </a:ln>
+        </p:spPr>
+      </p:sp>
+      <p:sp>
+        <p:nvSpPr>
+          <p:cNvPr id="18" name="">
+            <a:extLst xmlns:a="http://schemas.openxmlformats.org/drawingml/2006/main">
+              <a:ext uri="{FF2B5EF4-FFF2-40B4-BE49-F238E27FC236}">
+                <a16:creationId xmlns:a16="http://schemas.microsoft.com/office/drawing/2014/main" id="{9FA462AE-1888-440B-8A1F-DD0CE99E8C0F}"/>
+              </a:ext>
+            </a:extLst>
+          </p:cNvPr>
+          <p:cNvSpPr>
+            <a:spLocks xmlns:a="http://schemas.openxmlformats.org/drawingml/2006/main" noGrp="1"/>
+          </p:cNvSpPr>
+          <p:nvPr/>
+        </p:nvSpPr>
+        <p:spPr>
+          <a:xfrm xmlns:a="http://schemas.openxmlformats.org/drawingml/2006/main">
+            <a:off x="7162800" y="2705100"/>
+            <a:ext cx="4000500" cy="257175"/>
           </a:xfrm>
           <a:prstGeom xmlns:a="http://schemas.openxmlformats.org/drawingml/2006/main" prst="rect">
             <a:avLst/>
@@ -1474,9 +1862,9 @@
           <a:lstStyle xmlns:a="http://schemas.openxmlformats.org/drawingml/2006/main"/>
           <a:p xmlns:a="http://schemas.openxmlformats.org/drawingml/2006/main">
             <a:pPr algn="l">
-              <a:defRPr sz="1350" b="0">
-                <a:solidFill>
-                  <a:srgbClr val="475569"/>
+              <a:defRPr sz="1350" b="1">
+                <a:solidFill>
+                  <a:srgbClr val="1677C8"/>
                 </a:solidFill>
                 <a:latin typeface="Microsoft YaHei"/>
                 <a:ea typeface="Microsoft YaHei"/>
@@ -1484,45 +1872,103 @@
               </a:defRPr>
             </a:pPr>
             <a:r>
-              <a:rPr sz="1350" b="0">
-                <a:solidFill>
-                  <a:srgbClr val="475569"/>
+              <a:rPr sz="1350" b="1">
+                <a:solidFill>
+                  <a:srgbClr val="1677C8"/>
                 </a:solidFill>
                 <a:latin typeface="Microsoft YaHei"/>
                 <a:ea typeface="Microsoft YaHei"/>
                 <a:cs typeface="Microsoft YaHei"/>
               </a:rPr>
-              <a:t>第二阶段说明与关键观察</a:t>
+              <a:t>02  形成页面</a:t>
             </a:r>
           </a:p>
         </p:txBody>
       </p:sp>
       <p:sp>
         <p:nvSpPr>
-          <p:cNvPr id="8" name="">
-            <a:extLst xmlns:a="http://schemas.openxmlformats.org/drawingml/2006/main">
-              <a:ext uri="{FF2B5EF4-FFF2-40B4-BE49-F238E27FC236}">
-                <a16:creationId xmlns:a16="http://schemas.microsoft.com/office/drawing/2014/main" id="{96E76100-FC32-4572-ABBB-504772A390F2}"/>
-              </a:ext>
-            </a:extLst>
-          </p:cNvPr>
-          <p:cNvSpPr>
-            <a:spLocks xmlns:a="http://schemas.openxmlformats.org/drawingml/2006/main" noGrp="1"/>
-          </p:cNvSpPr>
-          <p:nvPr/>
-        </p:nvSpPr>
-        <p:spPr>
-          <a:xfrm xmlns:a="http://schemas.openxmlformats.org/drawingml/2006/main">
-            <a:off x="6391275" y="3028950"/>
-            <a:ext cx="1143000" cy="0"/>
+          <p:cNvPr id="19" name="">
+            <a:extLst xmlns:a="http://schemas.openxmlformats.org/drawingml/2006/main">
+              <a:ext uri="{FF2B5EF4-FFF2-40B4-BE49-F238E27FC236}">
+                <a16:creationId xmlns:a16="http://schemas.microsoft.com/office/drawing/2014/main" id="{D2795E89-3100-44A6-B58C-BB9EDDE462E5}"/>
+              </a:ext>
+            </a:extLst>
+          </p:cNvPr>
+          <p:cNvSpPr>
+            <a:spLocks xmlns:a="http://schemas.openxmlformats.org/drawingml/2006/main" noGrp="1"/>
+          </p:cNvSpPr>
+          <p:nvPr/>
+        </p:nvSpPr>
+        <p:spPr>
+          <a:xfrm xmlns:a="http://schemas.openxmlformats.org/drawingml/2006/main">
+            <a:off x="7162800" y="2971800"/>
+            <a:ext cx="4000500" cy="581025"/>
+          </a:xfrm>
+          <a:prstGeom xmlns:a="http://schemas.openxmlformats.org/drawingml/2006/main" prst="rect">
+            <a:avLst/>
+          </a:prstGeom>
+          <a:noFill xmlns:a="http://schemas.openxmlformats.org/drawingml/2006/main"/>
+          <a:ln xmlns:a="http://schemas.openxmlformats.org/drawingml/2006/main" w="0">
+            <a:noFill/>
+            <a:prstDash val="solid"/>
+          </a:ln>
+        </p:spPr>
+        <p:txBody>
+          <a:bodyPr xmlns:a="http://schemas.openxmlformats.org/drawingml/2006/main" lIns="0" tIns="0" rIns="0" bIns="0" anchor="t">
+            <a:normAutofit fontScale="100000"/>
+          </a:bodyPr>
+          <a:lstStyle xmlns:a="http://schemas.openxmlformats.org/drawingml/2006/main"/>
+          <a:p xmlns:a="http://schemas.openxmlformats.org/drawingml/2006/main">
+            <a:pPr algn="l">
+              <a:defRPr sz="1200" b="0">
+                <a:solidFill>
+                  <a:srgbClr val="475569"/>
+                </a:solidFill>
+                <a:latin typeface="Microsoft YaHei"/>
+                <a:ea typeface="Microsoft YaHei"/>
+                <a:cs typeface="Microsoft YaHei"/>
+              </a:defRPr>
+            </a:pPr>
+            <a:r>
+              <a:rPr sz="1200" b="0">
+                <a:solidFill>
+                  <a:srgbClr val="475569"/>
+                </a:solidFill>
+                <a:latin typeface="Microsoft YaHei"/>
+                <a:ea typeface="Microsoft YaHei"/>
+                <a:cs typeface="Microsoft YaHei"/>
+              </a:rPr>
+              <a:t>内容导演完成叙事拆页和页面职责判断</a:t>
+            </a:r>
+          </a:p>
+        </p:txBody>
+      </p:sp>
+      <p:sp>
+        <p:nvSpPr>
+          <p:cNvPr id="20" name="">
+            <a:extLst xmlns:a="http://schemas.openxmlformats.org/drawingml/2006/main">
+              <a:ext uri="{FF2B5EF4-FFF2-40B4-BE49-F238E27FC236}">
+                <a16:creationId xmlns:a16="http://schemas.microsoft.com/office/drawing/2014/main" id="{E40A0A07-6AF5-49F7-AE03-4B3D5B962992}"/>
+              </a:ext>
+            </a:extLst>
+          </p:cNvPr>
+          <p:cNvSpPr>
+            <a:spLocks xmlns:a="http://schemas.openxmlformats.org/drawingml/2006/main" noGrp="1"/>
+          </p:cNvSpPr>
+          <p:nvPr/>
+        </p:nvSpPr>
+        <p:spPr>
+          <a:xfrm xmlns:a="http://schemas.openxmlformats.org/drawingml/2006/main">
+            <a:off x="5591175" y="3100388"/>
+            <a:ext cx="781050" cy="0"/>
           </a:xfrm>
           <a:prstGeom xmlns:a="http://schemas.openxmlformats.org/drawingml/2006/main" prst="line">
             <a:avLst/>
           </a:prstGeom>
           <a:noFill xmlns:a="http://schemas.openxmlformats.org/drawingml/2006/main"/>
-          <a:ln xmlns:a="http://schemas.openxmlformats.org/drawingml/2006/main" w="14288">
+          <a:ln xmlns:a="http://schemas.openxmlformats.org/drawingml/2006/main" w="12383">
             <a:solidFill>
-              <a:srgbClr val="00A8D8"/>
+              <a:srgbClr val="91B8D7"/>
             </a:solidFill>
             <a:prstDash val="dash"/>
           </a:ln>
@@ -1530,28 +1976,28 @@
       </p:sp>
       <p:sp>
         <p:nvSpPr>
-          <p:cNvPr id="9" name="">
-            <a:extLst xmlns:a="http://schemas.openxmlformats.org/drawingml/2006/main">
-              <a:ext uri="{FF2B5EF4-FFF2-40B4-BE49-F238E27FC236}">
-                <a16:creationId xmlns:a16="http://schemas.microsoft.com/office/drawing/2014/main" id="{B63B4ABC-AFB6-4BB8-A213-29434555F67C}"/>
-              </a:ext>
-            </a:extLst>
-          </p:cNvPr>
-          <p:cNvSpPr>
-            <a:spLocks xmlns:a="http://schemas.openxmlformats.org/drawingml/2006/main" noGrp="1"/>
-          </p:cNvSpPr>
-          <p:nvPr/>
-        </p:nvSpPr>
-        <p:spPr>
-          <a:xfrm xmlns:a="http://schemas.openxmlformats.org/drawingml/2006/main">
-            <a:off x="3024188" y="3638550"/>
-            <a:ext cx="2714625" cy="990600"/>
+          <p:cNvPr id="21" name="PPAGENT_QA|parent=funnel-stage-2|domains=funnel-shape,funnel-content">
+            <a:extLst xmlns:a="http://schemas.openxmlformats.org/drawingml/2006/main">
+              <a:ext uri="{FF2B5EF4-FFF2-40B4-BE49-F238E27FC236}">
+                <a16:creationId xmlns:a16="http://schemas.microsoft.com/office/drawing/2014/main" id="{C697000C-2681-40CD-9A32-DE10D488D650}"/>
+              </a:ext>
+            </a:extLst>
+          </p:cNvPr>
+          <p:cNvSpPr>
+            <a:spLocks xmlns:a="http://schemas.openxmlformats.org/drawingml/2006/main" noGrp="1"/>
+          </p:cNvSpPr>
+          <p:nvPr/>
+        </p:nvSpPr>
+        <p:spPr>
+          <a:xfrm xmlns:a="http://schemas.openxmlformats.org/drawingml/2006/main">
+            <a:off x="1733550" y="3676650"/>
+            <a:ext cx="3238500" cy="1000125"/>
           </a:xfrm>
           <a:prstGeom xmlns:a="http://schemas.openxmlformats.org/drawingml/2006/main" prst="trapezoid">
             <a:avLst/>
           </a:prstGeom>
           <a:solidFill xmlns:a="http://schemas.openxmlformats.org/drawingml/2006/main">
-            <a:srgbClr val="14CBD1"/>
+            <a:srgbClr val="167FC1"/>
           </a:solidFill>
           <a:ln xmlns:a="http://schemas.openxmlformats.org/drawingml/2006/main" w="19050">
             <a:solidFill>
@@ -1563,19 +2009,81 @@
         <p:style>
           <a:lnRef xmlns:a="http://schemas.openxmlformats.org/drawingml/2006/main" idx="0"/>
           <a:fillRef xmlns:a="http://schemas.openxmlformats.org/drawingml/2006/main" idx="0"/>
-          <a:effectRef xmlns:a="http://schemas.openxmlformats.org/drawingml/2006/main" idx="6"/>
+          <a:effectRef xmlns:a="http://schemas.openxmlformats.org/drawingml/2006/main" idx="4"/>
           <a:fontRef xmlns:a="http://schemas.openxmlformats.org/drawingml/2006/main" idx="major"/>
         </p:style>
+      </p:sp>
+      <p:sp>
+        <p:nvSpPr>
+          <p:cNvPr id="22" name="">
+            <a:extLst xmlns:a="http://schemas.openxmlformats.org/drawingml/2006/main">
+              <a:ext uri="{FF2B5EF4-FFF2-40B4-BE49-F238E27FC236}">
+                <a16:creationId xmlns:a16="http://schemas.microsoft.com/office/drawing/2014/main" id="{CEA90C33-BE32-4082-9D79-6B038ECF4141}"/>
+              </a:ext>
+            </a:extLst>
+          </p:cNvPr>
+          <p:cNvSpPr>
+            <a:spLocks xmlns:a="http://schemas.openxmlformats.org/drawingml/2006/main" noGrp="1"/>
+          </p:cNvSpPr>
+          <p:nvPr/>
+        </p:nvSpPr>
+        <p:spPr>
+          <a:xfrm xmlns:a="http://schemas.openxmlformats.org/drawingml/2006/main">
+            <a:off x="1771650" y="3629025"/>
+            <a:ext cx="3162300" cy="209550"/>
+          </a:xfrm>
+          <a:prstGeom xmlns:a="http://schemas.openxmlformats.org/drawingml/2006/main" prst="ellipse">
+            <a:avLst/>
+          </a:prstGeom>
+          <a:solidFill xmlns:a="http://schemas.openxmlformats.org/drawingml/2006/main">
+            <a:srgbClr val="167FC1"/>
+          </a:solidFill>
+          <a:ln xmlns:a="http://schemas.openxmlformats.org/drawingml/2006/main" w="9525">
+            <a:solidFill>
+              <a:srgbClr val="FFFFFF"/>
+            </a:solidFill>
+            <a:prstDash val="solid"/>
+          </a:ln>
+        </p:spPr>
+      </p:sp>
+      <p:sp>
+        <p:nvSpPr>
+          <p:cNvPr id="23" name="">
+            <a:extLst xmlns:a="http://schemas.openxmlformats.org/drawingml/2006/main">
+              <a:ext uri="{FF2B5EF4-FFF2-40B4-BE49-F238E27FC236}">
+                <a16:creationId xmlns:a16="http://schemas.microsoft.com/office/drawing/2014/main" id="{109844FC-96D6-433E-8948-0C8862FF214D}"/>
+              </a:ext>
+            </a:extLst>
+          </p:cNvPr>
+          <p:cNvSpPr>
+            <a:spLocks xmlns:a="http://schemas.openxmlformats.org/drawingml/2006/main" noGrp="1"/>
+          </p:cNvSpPr>
+          <p:nvPr/>
+        </p:nvSpPr>
+        <p:spPr>
+          <a:xfrm xmlns:a="http://schemas.openxmlformats.org/drawingml/2006/main">
+            <a:off x="1885950" y="3771900"/>
+            <a:ext cx="2933700" cy="276225"/>
+          </a:xfrm>
+          <a:prstGeom xmlns:a="http://schemas.openxmlformats.org/drawingml/2006/main" prst="rect">
+            <a:avLst/>
+          </a:prstGeom>
+          <a:noFill xmlns:a="http://schemas.openxmlformats.org/drawingml/2006/main"/>
+          <a:ln xmlns:a="http://schemas.openxmlformats.org/drawingml/2006/main" w="0">
+            <a:noFill/>
+            <a:prstDash val="solid"/>
+          </a:ln>
+        </p:spPr>
         <p:txBody>
-          <a:bodyPr xmlns:a="http://schemas.openxmlformats.org/drawingml/2006/main" lIns="114300" tIns="76200" rIns="114300" bIns="76200" anchor="ctr">
+          <a:bodyPr xmlns:a="http://schemas.openxmlformats.org/drawingml/2006/main" lIns="0" tIns="0" rIns="0" bIns="0" anchor="ctr">
             <a:normAutofit fontScale="100000"/>
           </a:bodyPr>
           <a:lstStyle xmlns:a="http://schemas.openxmlformats.org/drawingml/2006/main"/>
           <a:p xmlns:a="http://schemas.openxmlformats.org/drawingml/2006/main">
             <a:pPr algn="ctr">
-              <a:defRPr sz="1650" b="1">
-                <a:solidFill>
-                  <a:srgbClr val="FFFFFF"/>
+              <a:defRPr sz="1800" b="1">
+                <a:solidFill>
+                  <a:srgbClr val="F6C96A"/>
                 </a:solidFill>
                 <a:latin typeface="Microsoft YaHei"/>
                 <a:ea typeface="Microsoft YaHei"/>
@@ -1583,20 +2091,55 @@
               </a:defRPr>
             </a:pPr>
             <a:r>
-              <a:rPr sz="1650" b="1">
-                <a:solidFill>
-                  <a:srgbClr val="FFFFFF"/>
+              <a:rPr sz="1800" b="1">
+                <a:solidFill>
+                  <a:srgbClr val="F6C96A"/>
                 </a:solidFill>
                 <a:latin typeface="Microsoft YaHei"/>
                 <a:ea typeface="Microsoft YaHei"/>
                 <a:cs typeface="Microsoft YaHei"/>
               </a:rPr>
-              <a:t>45%</a:t>
+              <a:t>52%</a:t>
             </a:r>
           </a:p>
+        </p:txBody>
+      </p:sp>
+      <p:sp>
+        <p:nvSpPr>
+          <p:cNvPr id="24" name="">
+            <a:extLst xmlns:a="http://schemas.openxmlformats.org/drawingml/2006/main">
+              <a:ext uri="{FF2B5EF4-FFF2-40B4-BE49-F238E27FC236}">
+                <a16:creationId xmlns:a16="http://schemas.microsoft.com/office/drawing/2014/main" id="{A2042101-2111-45F8-9970-EF422D9E3788}"/>
+              </a:ext>
+            </a:extLst>
+          </p:cNvPr>
+          <p:cNvSpPr>
+            <a:spLocks xmlns:a="http://schemas.openxmlformats.org/drawingml/2006/main" noGrp="1"/>
+          </p:cNvSpPr>
+          <p:nvPr/>
+        </p:nvSpPr>
+        <p:spPr>
+          <a:xfrm xmlns:a="http://schemas.openxmlformats.org/drawingml/2006/main">
+            <a:off x="1885950" y="4038600"/>
+            <a:ext cx="2933700" cy="295275"/>
+          </a:xfrm>
+          <a:prstGeom xmlns:a="http://schemas.openxmlformats.org/drawingml/2006/main" prst="rect">
+            <a:avLst/>
+          </a:prstGeom>
+          <a:noFill xmlns:a="http://schemas.openxmlformats.org/drawingml/2006/main"/>
+          <a:ln xmlns:a="http://schemas.openxmlformats.org/drawingml/2006/main" w="0">
+            <a:noFill/>
+            <a:prstDash val="solid"/>
+          </a:ln>
+        </p:spPr>
+        <p:txBody>
+          <a:bodyPr xmlns:a="http://schemas.openxmlformats.org/drawingml/2006/main" lIns="0" tIns="0" rIns="0" bIns="0" anchor="ctr">
+            <a:normAutofit fontScale="100000"/>
+          </a:bodyPr>
+          <a:lstStyle xmlns:a="http://schemas.openxmlformats.org/drawingml/2006/main"/>
           <a:p xmlns:a="http://schemas.openxmlformats.org/drawingml/2006/main">
             <a:pPr algn="ctr">
-              <a:defRPr sz="1650" b="1">
+              <a:defRPr sz="1500" b="1">
                 <a:solidFill>
                   <a:srgbClr val="FFFFFF"/>
                 </a:solidFill>
@@ -1606,7 +2149,7 @@
               </a:defRPr>
             </a:pPr>
             <a:r>
-              <a:rPr sz="1650" b="1">
+              <a:rPr sz="1500" b="1">
                 <a:solidFill>
                   <a:srgbClr val="FFFFFF"/>
                 </a:solidFill>
@@ -1614,29 +2157,97 @@
                 <a:ea typeface="Microsoft YaHei"/>
                 <a:cs typeface="Microsoft YaHei"/>
               </a:rPr>
-              <a:t>行动</a:t>
+              <a:t>匹配资产</a:t>
             </a:r>
           </a:p>
         </p:txBody>
       </p:sp>
       <p:sp>
         <p:nvSpPr>
-          <p:cNvPr id="10" name="">
-            <a:extLst xmlns:a="http://schemas.openxmlformats.org/drawingml/2006/main">
-              <a:ext uri="{FF2B5EF4-FFF2-40B4-BE49-F238E27FC236}">
-                <a16:creationId xmlns:a16="http://schemas.microsoft.com/office/drawing/2014/main" id="{A3C580CE-72AA-4D9C-88F8-8237C892AD46}"/>
-              </a:ext>
-            </a:extLst>
-          </p:cNvPr>
-          <p:cNvSpPr>
-            <a:spLocks xmlns:a="http://schemas.openxmlformats.org/drawingml/2006/main" noGrp="1"/>
-          </p:cNvSpPr>
-          <p:nvPr/>
-        </p:nvSpPr>
-        <p:spPr>
-          <a:xfrm xmlns:a="http://schemas.openxmlformats.org/drawingml/2006/main">
-            <a:off x="7239000" y="3771900"/>
-            <a:ext cx="4000500" cy="723900"/>
+          <p:cNvPr id="25" name="PPAGENT_QA|parent=funnel-note-2|domains=funnel-note,funnel-content">
+            <a:extLst xmlns:a="http://schemas.openxmlformats.org/drawingml/2006/main">
+              <a:ext uri="{FF2B5EF4-FFF2-40B4-BE49-F238E27FC236}">
+                <a16:creationId xmlns:a16="http://schemas.microsoft.com/office/drawing/2014/main" id="{E5925954-2D46-42D4-B009-BFBE0CF3577A}"/>
+              </a:ext>
+            </a:extLst>
+          </p:cNvPr>
+          <p:cNvSpPr>
+            <a:spLocks xmlns:a="http://schemas.openxmlformats.org/drawingml/2006/main" noGrp="1"/>
+          </p:cNvSpPr>
+          <p:nvPr/>
+        </p:nvSpPr>
+        <p:spPr>
+          <a:xfrm xmlns:a="http://schemas.openxmlformats.org/drawingml/2006/main">
+            <a:off x="6915150" y="3686175"/>
+            <a:ext cx="4552950" cy="981075"/>
+          </a:xfrm>
+          <a:prstGeom xmlns:a="http://schemas.openxmlformats.org/drawingml/2006/main" prst="roundRect">
+            <a:avLst>
+              <a:gd name="adj" fmla="val 11650"/>
+            </a:avLst>
+          </a:prstGeom>
+          <a:solidFill xmlns:a="http://schemas.openxmlformats.org/drawingml/2006/main">
+            <a:srgbClr val="FFFFFF"/>
+          </a:solidFill>
+          <a:ln xmlns:a="http://schemas.openxmlformats.org/drawingml/2006/main" w="9525">
+            <a:solidFill>
+              <a:srgbClr val="D8E5EF"/>
+            </a:solidFill>
+            <a:prstDash val="solid"/>
+          </a:ln>
+        </p:spPr>
+      </p:sp>
+      <p:sp>
+        <p:nvSpPr>
+          <p:cNvPr id="26" name="">
+            <a:extLst xmlns:a="http://schemas.openxmlformats.org/drawingml/2006/main">
+              <a:ext uri="{FF2B5EF4-FFF2-40B4-BE49-F238E27FC236}">
+                <a16:creationId xmlns:a16="http://schemas.microsoft.com/office/drawing/2014/main" id="{B490CF5F-9931-4234-BE95-3C182BD4E756}"/>
+              </a:ext>
+            </a:extLst>
+          </p:cNvPr>
+          <p:cNvSpPr>
+            <a:spLocks xmlns:a="http://schemas.openxmlformats.org/drawingml/2006/main" noGrp="1"/>
+          </p:cNvSpPr>
+          <p:nvPr/>
+        </p:nvSpPr>
+        <p:spPr>
+          <a:xfrm xmlns:a="http://schemas.openxmlformats.org/drawingml/2006/main">
+            <a:off x="6915150" y="3686175"/>
+            <a:ext cx="57150" cy="981075"/>
+          </a:xfrm>
+          <a:prstGeom xmlns:a="http://schemas.openxmlformats.org/drawingml/2006/main" prst="roundRect">
+            <a:avLst>
+              <a:gd name="adj" fmla="val 33333"/>
+            </a:avLst>
+          </a:prstGeom>
+          <a:solidFill xmlns:a="http://schemas.openxmlformats.org/drawingml/2006/main">
+            <a:srgbClr val="167FC1"/>
+          </a:solidFill>
+          <a:ln xmlns:a="http://schemas.openxmlformats.org/drawingml/2006/main" w="0">
+            <a:noFill/>
+            <a:prstDash val="solid"/>
+          </a:ln>
+        </p:spPr>
+      </p:sp>
+      <p:sp>
+        <p:nvSpPr>
+          <p:cNvPr id="27" name="">
+            <a:extLst xmlns:a="http://schemas.openxmlformats.org/drawingml/2006/main">
+              <a:ext uri="{FF2B5EF4-FFF2-40B4-BE49-F238E27FC236}">
+                <a16:creationId xmlns:a16="http://schemas.microsoft.com/office/drawing/2014/main" id="{AEBC1AF7-7F0B-461D-8AFB-E01079B0FE70}"/>
+              </a:ext>
+            </a:extLst>
+          </p:cNvPr>
+          <p:cNvSpPr>
+            <a:spLocks xmlns:a="http://schemas.openxmlformats.org/drawingml/2006/main" noGrp="1"/>
+          </p:cNvSpPr>
+          <p:nvPr/>
+        </p:nvSpPr>
+        <p:spPr>
+          <a:xfrm xmlns:a="http://schemas.openxmlformats.org/drawingml/2006/main">
+            <a:off x="7162800" y="3781425"/>
+            <a:ext cx="4000500" cy="257175"/>
           </a:xfrm>
           <a:prstGeom xmlns:a="http://schemas.openxmlformats.org/drawingml/2006/main" prst="rect">
             <a:avLst/>
@@ -1654,9 +2265,9 @@
           <a:lstStyle xmlns:a="http://schemas.openxmlformats.org/drawingml/2006/main"/>
           <a:p xmlns:a="http://schemas.openxmlformats.org/drawingml/2006/main">
             <a:pPr algn="l">
-              <a:defRPr sz="1350" b="0">
-                <a:solidFill>
-                  <a:srgbClr val="475569"/>
+              <a:defRPr sz="1350" b="1">
+                <a:solidFill>
+                  <a:srgbClr val="1677C8"/>
                 </a:solidFill>
                 <a:latin typeface="Microsoft YaHei"/>
                 <a:ea typeface="Microsoft YaHei"/>
@@ -1664,45 +2275,103 @@
               </a:defRPr>
             </a:pPr>
             <a:r>
-              <a:rPr sz="1350" b="0">
-                <a:solidFill>
-                  <a:srgbClr val="475569"/>
+              <a:rPr sz="1350" b="1">
+                <a:solidFill>
+                  <a:srgbClr val="1677C8"/>
                 </a:solidFill>
                 <a:latin typeface="Microsoft YaHei"/>
                 <a:ea typeface="Microsoft YaHei"/>
                 <a:cs typeface="Microsoft YaHei"/>
               </a:rPr>
-              <a:t>第三阶段说明与关键观察</a:t>
+              <a:t>03  匹配资产</a:t>
             </a:r>
           </a:p>
         </p:txBody>
       </p:sp>
       <p:sp>
         <p:nvSpPr>
-          <p:cNvPr id="11" name="">
-            <a:extLst xmlns:a="http://schemas.openxmlformats.org/drawingml/2006/main">
-              <a:ext uri="{FF2B5EF4-FFF2-40B4-BE49-F238E27FC236}">
-                <a16:creationId xmlns:a16="http://schemas.microsoft.com/office/drawing/2014/main" id="{71FC031D-3B65-44CF-A23B-8C3423E5DBD7}"/>
-              </a:ext>
-            </a:extLst>
-          </p:cNvPr>
-          <p:cNvSpPr>
-            <a:spLocks xmlns:a="http://schemas.openxmlformats.org/drawingml/2006/main" noGrp="1"/>
-          </p:cNvSpPr>
-          <p:nvPr/>
-        </p:nvSpPr>
-        <p:spPr>
-          <a:xfrm xmlns:a="http://schemas.openxmlformats.org/drawingml/2006/main">
-            <a:off x="5891213" y="4133850"/>
-            <a:ext cx="1143000" cy="0"/>
+          <p:cNvPr id="28" name="">
+            <a:extLst xmlns:a="http://schemas.openxmlformats.org/drawingml/2006/main">
+              <a:ext uri="{FF2B5EF4-FFF2-40B4-BE49-F238E27FC236}">
+                <a16:creationId xmlns:a16="http://schemas.microsoft.com/office/drawing/2014/main" id="{3DE8E6AE-115B-46AD-BA46-6A9435F49D56}"/>
+              </a:ext>
+            </a:extLst>
+          </p:cNvPr>
+          <p:cNvSpPr>
+            <a:spLocks xmlns:a="http://schemas.openxmlformats.org/drawingml/2006/main" noGrp="1"/>
+          </p:cNvSpPr>
+          <p:nvPr/>
+        </p:nvSpPr>
+        <p:spPr>
+          <a:xfrm xmlns:a="http://schemas.openxmlformats.org/drawingml/2006/main">
+            <a:off x="7162800" y="4048125"/>
+            <a:ext cx="4000500" cy="581025"/>
+          </a:xfrm>
+          <a:prstGeom xmlns:a="http://schemas.openxmlformats.org/drawingml/2006/main" prst="rect">
+            <a:avLst/>
+          </a:prstGeom>
+          <a:noFill xmlns:a="http://schemas.openxmlformats.org/drawingml/2006/main"/>
+          <a:ln xmlns:a="http://schemas.openxmlformats.org/drawingml/2006/main" w="0">
+            <a:noFill/>
+            <a:prstDash val="solid"/>
+          </a:ln>
+        </p:spPr>
+        <p:txBody>
+          <a:bodyPr xmlns:a="http://schemas.openxmlformats.org/drawingml/2006/main" lIns="0" tIns="0" rIns="0" bIns="0" anchor="t">
+            <a:normAutofit fontScale="100000"/>
+          </a:bodyPr>
+          <a:lstStyle xmlns:a="http://schemas.openxmlformats.org/drawingml/2006/main"/>
+          <a:p xmlns:a="http://schemas.openxmlformats.org/drawingml/2006/main">
+            <a:pPr algn="l">
+              <a:defRPr sz="1200" b="0">
+                <a:solidFill>
+                  <a:srgbClr val="475569"/>
+                </a:solidFill>
+                <a:latin typeface="Microsoft YaHei"/>
+                <a:ea typeface="Microsoft YaHei"/>
+                <a:cs typeface="Microsoft YaHei"/>
+              </a:defRPr>
+            </a:pPr>
+            <a:r>
+              <a:rPr sz="1200" b="0">
+                <a:solidFill>
+                  <a:srgbClr val="475569"/>
+                </a:solidFill>
+                <a:latin typeface="Microsoft YaHei"/>
+                <a:ea typeface="Microsoft YaHei"/>
+                <a:cs typeface="Microsoft YaHei"/>
+              </a:rPr>
+              <a:t>视觉导演只从合法候选中选择适配结构</a:t>
+            </a:r>
+          </a:p>
+        </p:txBody>
+      </p:sp>
+      <p:sp>
+        <p:nvSpPr>
+          <p:cNvPr id="29" name="">
+            <a:extLst xmlns:a="http://schemas.openxmlformats.org/drawingml/2006/main">
+              <a:ext uri="{FF2B5EF4-FFF2-40B4-BE49-F238E27FC236}">
+                <a16:creationId xmlns:a16="http://schemas.microsoft.com/office/drawing/2014/main" id="{4DE5813A-9585-493B-966F-1442D4DC0011}"/>
+              </a:ext>
+            </a:extLst>
+          </p:cNvPr>
+          <p:cNvSpPr>
+            <a:spLocks xmlns:a="http://schemas.openxmlformats.org/drawingml/2006/main" noGrp="1"/>
+          </p:cNvSpPr>
+          <p:nvPr/>
+        </p:nvSpPr>
+        <p:spPr>
+          <a:xfrm xmlns:a="http://schemas.openxmlformats.org/drawingml/2006/main">
+            <a:off x="5067300" y="4176713"/>
+            <a:ext cx="781050" cy="0"/>
           </a:xfrm>
           <a:prstGeom xmlns:a="http://schemas.openxmlformats.org/drawingml/2006/main" prst="line">
             <a:avLst/>
           </a:prstGeom>
           <a:noFill xmlns:a="http://schemas.openxmlformats.org/drawingml/2006/main"/>
-          <a:ln xmlns:a="http://schemas.openxmlformats.org/drawingml/2006/main" w="14288">
+          <a:ln xmlns:a="http://schemas.openxmlformats.org/drawingml/2006/main" w="12383">
             <a:solidFill>
-              <a:srgbClr val="00A8D8"/>
+              <a:srgbClr val="91B8D7"/>
             </a:solidFill>
             <a:prstDash val="dash"/>
           </a:ln>
@@ -1710,28 +2379,28 @@
       </p:sp>
       <p:sp>
         <p:nvSpPr>
-          <p:cNvPr id="12" name="">
-            <a:extLst xmlns:a="http://schemas.openxmlformats.org/drawingml/2006/main">
-              <a:ext uri="{FF2B5EF4-FFF2-40B4-BE49-F238E27FC236}">
-                <a16:creationId xmlns:a16="http://schemas.microsoft.com/office/drawing/2014/main" id="{CDFD0223-E979-4CBF-AE12-1DA29DDADE39}"/>
-              </a:ext>
-            </a:extLst>
-          </p:cNvPr>
-          <p:cNvSpPr>
-            <a:spLocks xmlns:a="http://schemas.openxmlformats.org/drawingml/2006/main" noGrp="1"/>
-          </p:cNvSpPr>
-          <p:nvPr/>
-        </p:nvSpPr>
-        <p:spPr>
-          <a:xfrm xmlns:a="http://schemas.openxmlformats.org/drawingml/2006/main">
-            <a:off x="3524250" y="4743450"/>
-            <a:ext cx="1714500" cy="990600"/>
+          <p:cNvPr id="30" name="PPAGENT_QA|parent=funnel-stage-3|domains=funnel-shape,funnel-content">
+            <a:extLst xmlns:a="http://schemas.openxmlformats.org/drawingml/2006/main">
+              <a:ext uri="{FF2B5EF4-FFF2-40B4-BE49-F238E27FC236}">
+                <a16:creationId xmlns:a16="http://schemas.microsoft.com/office/drawing/2014/main" id="{4C64D786-2A0E-46A7-916D-C10E631F5F43}"/>
+              </a:ext>
+            </a:extLst>
+          </p:cNvPr>
+          <p:cNvSpPr>
+            <a:spLocks xmlns:a="http://schemas.openxmlformats.org/drawingml/2006/main" noGrp="1"/>
+          </p:cNvSpPr>
+          <p:nvPr/>
+        </p:nvSpPr>
+        <p:spPr>
+          <a:xfrm xmlns:a="http://schemas.openxmlformats.org/drawingml/2006/main">
+            <a:off x="2257425" y="4752975"/>
+            <a:ext cx="2190750" cy="1000125"/>
           </a:xfrm>
           <a:prstGeom xmlns:a="http://schemas.openxmlformats.org/drawingml/2006/main" prst="trapezoid">
             <a:avLst/>
           </a:prstGeom>
           <a:solidFill xmlns:a="http://schemas.openxmlformats.org/drawingml/2006/main">
-            <a:srgbClr val="4C8FD8"/>
+            <a:srgbClr val="16A0C4"/>
           </a:solidFill>
           <a:ln xmlns:a="http://schemas.openxmlformats.org/drawingml/2006/main" w="19050">
             <a:solidFill>
@@ -1743,19 +2412,81 @@
         <p:style>
           <a:lnRef xmlns:a="http://schemas.openxmlformats.org/drawingml/2006/main" idx="0"/>
           <a:fillRef xmlns:a="http://schemas.openxmlformats.org/drawingml/2006/main" idx="0"/>
-          <a:effectRef xmlns:a="http://schemas.openxmlformats.org/drawingml/2006/main" idx="6"/>
+          <a:effectRef xmlns:a="http://schemas.openxmlformats.org/drawingml/2006/main" idx="4"/>
           <a:fontRef xmlns:a="http://schemas.openxmlformats.org/drawingml/2006/main" idx="major"/>
         </p:style>
+      </p:sp>
+      <p:sp>
+        <p:nvSpPr>
+          <p:cNvPr id="31" name="">
+            <a:extLst xmlns:a="http://schemas.openxmlformats.org/drawingml/2006/main">
+              <a:ext uri="{FF2B5EF4-FFF2-40B4-BE49-F238E27FC236}">
+                <a16:creationId xmlns:a16="http://schemas.microsoft.com/office/drawing/2014/main" id="{A4961EC9-6690-429A-BE6C-F9AF041354F6}"/>
+              </a:ext>
+            </a:extLst>
+          </p:cNvPr>
+          <p:cNvSpPr>
+            <a:spLocks xmlns:a="http://schemas.openxmlformats.org/drawingml/2006/main" noGrp="1"/>
+          </p:cNvSpPr>
+          <p:nvPr/>
+        </p:nvSpPr>
+        <p:spPr>
+          <a:xfrm xmlns:a="http://schemas.openxmlformats.org/drawingml/2006/main">
+            <a:off x="2295525" y="4705350"/>
+            <a:ext cx="2114550" cy="209550"/>
+          </a:xfrm>
+          <a:prstGeom xmlns:a="http://schemas.openxmlformats.org/drawingml/2006/main" prst="ellipse">
+            <a:avLst/>
+          </a:prstGeom>
+          <a:solidFill xmlns:a="http://schemas.openxmlformats.org/drawingml/2006/main">
+            <a:srgbClr val="16A0C4"/>
+          </a:solidFill>
+          <a:ln xmlns:a="http://schemas.openxmlformats.org/drawingml/2006/main" w="9525">
+            <a:solidFill>
+              <a:srgbClr val="FFFFFF"/>
+            </a:solidFill>
+            <a:prstDash val="solid"/>
+          </a:ln>
+        </p:spPr>
+      </p:sp>
+      <p:sp>
+        <p:nvSpPr>
+          <p:cNvPr id="32" name="">
+            <a:extLst xmlns:a="http://schemas.openxmlformats.org/drawingml/2006/main">
+              <a:ext uri="{FF2B5EF4-FFF2-40B4-BE49-F238E27FC236}">
+                <a16:creationId xmlns:a16="http://schemas.microsoft.com/office/drawing/2014/main" id="{4B58897C-38AB-4382-B333-3F3ED1D18A6D}"/>
+              </a:ext>
+            </a:extLst>
+          </p:cNvPr>
+          <p:cNvSpPr>
+            <a:spLocks xmlns:a="http://schemas.openxmlformats.org/drawingml/2006/main" noGrp="1"/>
+          </p:cNvSpPr>
+          <p:nvPr/>
+        </p:nvSpPr>
+        <p:spPr>
+          <a:xfrm xmlns:a="http://schemas.openxmlformats.org/drawingml/2006/main">
+            <a:off x="2409825" y="4848225"/>
+            <a:ext cx="1885950" cy="276225"/>
+          </a:xfrm>
+          <a:prstGeom xmlns:a="http://schemas.openxmlformats.org/drawingml/2006/main" prst="rect">
+            <a:avLst/>
+          </a:prstGeom>
+          <a:noFill xmlns:a="http://schemas.openxmlformats.org/drawingml/2006/main"/>
+          <a:ln xmlns:a="http://schemas.openxmlformats.org/drawingml/2006/main" w="0">
+            <a:noFill/>
+            <a:prstDash val="solid"/>
+          </a:ln>
+        </p:spPr>
         <p:txBody>
-          <a:bodyPr xmlns:a="http://schemas.openxmlformats.org/drawingml/2006/main" lIns="114300" tIns="76200" rIns="114300" bIns="76200" anchor="ctr">
+          <a:bodyPr xmlns:a="http://schemas.openxmlformats.org/drawingml/2006/main" lIns="0" tIns="0" rIns="0" bIns="0" anchor="ctr">
             <a:normAutofit fontScale="100000"/>
           </a:bodyPr>
           <a:lstStyle xmlns:a="http://schemas.openxmlformats.org/drawingml/2006/main"/>
           <a:p xmlns:a="http://schemas.openxmlformats.org/drawingml/2006/main">
             <a:pPr algn="ctr">
-              <a:defRPr sz="1650" b="1">
-                <a:solidFill>
-                  <a:srgbClr val="FFFFFF"/>
+              <a:defRPr sz="1800" b="1">
+                <a:solidFill>
+                  <a:srgbClr val="F6C96A"/>
                 </a:solidFill>
                 <a:latin typeface="Microsoft YaHei"/>
                 <a:ea typeface="Microsoft YaHei"/>
@@ -1763,20 +2494,55 @@
               </a:defRPr>
             </a:pPr>
             <a:r>
-              <a:rPr sz="1650" b="1">
-                <a:solidFill>
-                  <a:srgbClr val="FFFFFF"/>
+              <a:rPr sz="1800" b="1">
+                <a:solidFill>
+                  <a:srgbClr val="F6C96A"/>
                 </a:solidFill>
                 <a:latin typeface="Microsoft YaHei"/>
                 <a:ea typeface="Microsoft YaHei"/>
                 <a:cs typeface="Microsoft YaHei"/>
               </a:rPr>
-              <a:t>28%</a:t>
+              <a:t>36%</a:t>
             </a:r>
           </a:p>
+        </p:txBody>
+      </p:sp>
+      <p:sp>
+        <p:nvSpPr>
+          <p:cNvPr id="33" name="">
+            <a:extLst xmlns:a="http://schemas.openxmlformats.org/drawingml/2006/main">
+              <a:ext uri="{FF2B5EF4-FFF2-40B4-BE49-F238E27FC236}">
+                <a16:creationId xmlns:a16="http://schemas.microsoft.com/office/drawing/2014/main" id="{1366B77F-5FCF-4A6D-913F-EAF542132C04}"/>
+              </a:ext>
+            </a:extLst>
+          </p:cNvPr>
+          <p:cNvSpPr>
+            <a:spLocks xmlns:a="http://schemas.openxmlformats.org/drawingml/2006/main" noGrp="1"/>
+          </p:cNvSpPr>
+          <p:nvPr/>
+        </p:nvSpPr>
+        <p:spPr>
+          <a:xfrm xmlns:a="http://schemas.openxmlformats.org/drawingml/2006/main">
+            <a:off x="2409825" y="5114925"/>
+            <a:ext cx="1885950" cy="295275"/>
+          </a:xfrm>
+          <a:prstGeom xmlns:a="http://schemas.openxmlformats.org/drawingml/2006/main" prst="rect">
+            <a:avLst/>
+          </a:prstGeom>
+          <a:noFill xmlns:a="http://schemas.openxmlformats.org/drawingml/2006/main"/>
+          <a:ln xmlns:a="http://schemas.openxmlformats.org/drawingml/2006/main" w="0">
+            <a:noFill/>
+            <a:prstDash val="solid"/>
+          </a:ln>
+        </p:spPr>
+        <p:txBody>
+          <a:bodyPr xmlns:a="http://schemas.openxmlformats.org/drawingml/2006/main" lIns="0" tIns="0" rIns="0" bIns="0" anchor="ctr">
+            <a:normAutofit fontScale="100000"/>
+          </a:bodyPr>
+          <a:lstStyle xmlns:a="http://schemas.openxmlformats.org/drawingml/2006/main"/>
           <a:p xmlns:a="http://schemas.openxmlformats.org/drawingml/2006/main">
             <a:pPr algn="ctr">
-              <a:defRPr sz="1650" b="1">
+              <a:defRPr sz="1500" b="1">
                 <a:solidFill>
                   <a:srgbClr val="FFFFFF"/>
                 </a:solidFill>
@@ -1786,7 +2552,7 @@
               </a:defRPr>
             </a:pPr>
             <a:r>
-              <a:rPr sz="1650" b="1">
+              <a:rPr sz="1500" b="1">
                 <a:solidFill>
                   <a:srgbClr val="FFFFFF"/>
                 </a:solidFill>
@@ -1794,29 +2560,97 @@
                 <a:ea typeface="Microsoft YaHei"/>
                 <a:cs typeface="Microsoft YaHei"/>
               </a:rPr>
-              <a:t>完成</a:t>
+              <a:t>可靠交付</a:t>
             </a:r>
           </a:p>
         </p:txBody>
       </p:sp>
       <p:sp>
         <p:nvSpPr>
-          <p:cNvPr id="13" name="">
-            <a:extLst xmlns:a="http://schemas.openxmlformats.org/drawingml/2006/main">
-              <a:ext uri="{FF2B5EF4-FFF2-40B4-BE49-F238E27FC236}">
-                <a16:creationId xmlns:a16="http://schemas.microsoft.com/office/drawing/2014/main" id="{8738604F-8BE5-4FDE-A082-5FC61333ED71}"/>
-              </a:ext>
-            </a:extLst>
-          </p:cNvPr>
-          <p:cNvSpPr>
-            <a:spLocks xmlns:a="http://schemas.openxmlformats.org/drawingml/2006/main" noGrp="1"/>
-          </p:cNvSpPr>
-          <p:nvPr/>
-        </p:nvSpPr>
-        <p:spPr>
-          <a:xfrm xmlns:a="http://schemas.openxmlformats.org/drawingml/2006/main">
-            <a:off x="7239000" y="4876800"/>
-            <a:ext cx="4000500" cy="723900"/>
+          <p:cNvPr id="34" name="PPAGENT_QA|parent=funnel-note-3|domains=funnel-note,funnel-content">
+            <a:extLst xmlns:a="http://schemas.openxmlformats.org/drawingml/2006/main">
+              <a:ext uri="{FF2B5EF4-FFF2-40B4-BE49-F238E27FC236}">
+                <a16:creationId xmlns:a16="http://schemas.microsoft.com/office/drawing/2014/main" id="{F5781777-BDEE-487A-B131-18DBE2A22FFE}"/>
+              </a:ext>
+            </a:extLst>
+          </p:cNvPr>
+          <p:cNvSpPr>
+            <a:spLocks xmlns:a="http://schemas.openxmlformats.org/drawingml/2006/main" noGrp="1"/>
+          </p:cNvSpPr>
+          <p:nvPr/>
+        </p:nvSpPr>
+        <p:spPr>
+          <a:xfrm xmlns:a="http://schemas.openxmlformats.org/drawingml/2006/main">
+            <a:off x="6915150" y="4762500"/>
+            <a:ext cx="4552950" cy="981075"/>
+          </a:xfrm>
+          <a:prstGeom xmlns:a="http://schemas.openxmlformats.org/drawingml/2006/main" prst="roundRect">
+            <a:avLst>
+              <a:gd name="adj" fmla="val 11650"/>
+            </a:avLst>
+          </a:prstGeom>
+          <a:solidFill xmlns:a="http://schemas.openxmlformats.org/drawingml/2006/main">
+            <a:srgbClr val="F7FAFC"/>
+          </a:solidFill>
+          <a:ln xmlns:a="http://schemas.openxmlformats.org/drawingml/2006/main" w="9525">
+            <a:solidFill>
+              <a:srgbClr val="D8E5EF"/>
+            </a:solidFill>
+            <a:prstDash val="solid"/>
+          </a:ln>
+        </p:spPr>
+      </p:sp>
+      <p:sp>
+        <p:nvSpPr>
+          <p:cNvPr id="35" name="">
+            <a:extLst xmlns:a="http://schemas.openxmlformats.org/drawingml/2006/main">
+              <a:ext uri="{FF2B5EF4-FFF2-40B4-BE49-F238E27FC236}">
+                <a16:creationId xmlns:a16="http://schemas.microsoft.com/office/drawing/2014/main" id="{E8B65B7D-83B7-4BA6-A043-95994EDFBC19}"/>
+              </a:ext>
+            </a:extLst>
+          </p:cNvPr>
+          <p:cNvSpPr>
+            <a:spLocks xmlns:a="http://schemas.openxmlformats.org/drawingml/2006/main" noGrp="1"/>
+          </p:cNvSpPr>
+          <p:nvPr/>
+        </p:nvSpPr>
+        <p:spPr>
+          <a:xfrm xmlns:a="http://schemas.openxmlformats.org/drawingml/2006/main">
+            <a:off x="6915150" y="4762500"/>
+            <a:ext cx="57150" cy="981075"/>
+          </a:xfrm>
+          <a:prstGeom xmlns:a="http://schemas.openxmlformats.org/drawingml/2006/main" prst="roundRect">
+            <a:avLst>
+              <a:gd name="adj" fmla="val 33333"/>
+            </a:avLst>
+          </a:prstGeom>
+          <a:solidFill xmlns:a="http://schemas.openxmlformats.org/drawingml/2006/main">
+            <a:srgbClr val="16A0C4"/>
+          </a:solidFill>
+          <a:ln xmlns:a="http://schemas.openxmlformats.org/drawingml/2006/main" w="0">
+            <a:noFill/>
+            <a:prstDash val="solid"/>
+          </a:ln>
+        </p:spPr>
+      </p:sp>
+      <p:sp>
+        <p:nvSpPr>
+          <p:cNvPr id="36" name="">
+            <a:extLst xmlns:a="http://schemas.openxmlformats.org/drawingml/2006/main">
+              <a:ext uri="{FF2B5EF4-FFF2-40B4-BE49-F238E27FC236}">
+                <a16:creationId xmlns:a16="http://schemas.microsoft.com/office/drawing/2014/main" id="{FE10A738-3111-4C50-8B6C-458F27B551D6}"/>
+              </a:ext>
+            </a:extLst>
+          </p:cNvPr>
+          <p:cNvSpPr>
+            <a:spLocks xmlns:a="http://schemas.openxmlformats.org/drawingml/2006/main" noGrp="1"/>
+          </p:cNvSpPr>
+          <p:nvPr/>
+        </p:nvSpPr>
+        <p:spPr>
+          <a:xfrm xmlns:a="http://schemas.openxmlformats.org/drawingml/2006/main">
+            <a:off x="7162800" y="4857750"/>
+            <a:ext cx="4000500" cy="257175"/>
           </a:xfrm>
           <a:prstGeom xmlns:a="http://schemas.openxmlformats.org/drawingml/2006/main" prst="rect">
             <a:avLst/>
@@ -1834,9 +2668,9 @@
           <a:lstStyle xmlns:a="http://schemas.openxmlformats.org/drawingml/2006/main"/>
           <a:p xmlns:a="http://schemas.openxmlformats.org/drawingml/2006/main">
             <a:pPr algn="l">
-              <a:defRPr sz="1350" b="0">
-                <a:solidFill>
-                  <a:srgbClr val="475569"/>
+              <a:defRPr sz="1350" b="1">
+                <a:solidFill>
+                  <a:srgbClr val="1677C8"/>
                 </a:solidFill>
                 <a:latin typeface="Microsoft YaHei"/>
                 <a:ea typeface="Microsoft YaHei"/>
@@ -1844,45 +2678,103 @@
               </a:defRPr>
             </a:pPr>
             <a:r>
-              <a:rPr sz="1350" b="0">
-                <a:solidFill>
-                  <a:srgbClr val="475569"/>
+              <a:rPr sz="1350" b="1">
+                <a:solidFill>
+                  <a:srgbClr val="1677C8"/>
                 </a:solidFill>
                 <a:latin typeface="Microsoft YaHei"/>
                 <a:ea typeface="Microsoft YaHei"/>
                 <a:cs typeface="Microsoft YaHei"/>
               </a:rPr>
-              <a:t>第四阶段说明与关键观察</a:t>
+              <a:t>04  可靠交付</a:t>
             </a:r>
           </a:p>
         </p:txBody>
       </p:sp>
       <p:sp>
         <p:nvSpPr>
-          <p:cNvPr id="14" name="">
-            <a:extLst xmlns:a="http://schemas.openxmlformats.org/drawingml/2006/main">
-              <a:ext uri="{FF2B5EF4-FFF2-40B4-BE49-F238E27FC236}">
-                <a16:creationId xmlns:a16="http://schemas.microsoft.com/office/drawing/2014/main" id="{065EBA86-6034-42F9-AEB0-310DF5ECD7B3}"/>
-              </a:ext>
-            </a:extLst>
-          </p:cNvPr>
-          <p:cNvSpPr>
-            <a:spLocks xmlns:a="http://schemas.openxmlformats.org/drawingml/2006/main" noGrp="1"/>
-          </p:cNvSpPr>
-          <p:nvPr/>
-        </p:nvSpPr>
-        <p:spPr>
-          <a:xfrm xmlns:a="http://schemas.openxmlformats.org/drawingml/2006/main">
-            <a:off x="5391150" y="5238750"/>
-            <a:ext cx="1143000" cy="0"/>
+          <p:cNvPr id="37" name="">
+            <a:extLst xmlns:a="http://schemas.openxmlformats.org/drawingml/2006/main">
+              <a:ext uri="{FF2B5EF4-FFF2-40B4-BE49-F238E27FC236}">
+                <a16:creationId xmlns:a16="http://schemas.microsoft.com/office/drawing/2014/main" id="{A664C5EE-1517-4C66-9A98-FCC6F89692EE}"/>
+              </a:ext>
+            </a:extLst>
+          </p:cNvPr>
+          <p:cNvSpPr>
+            <a:spLocks xmlns:a="http://schemas.openxmlformats.org/drawingml/2006/main" noGrp="1"/>
+          </p:cNvSpPr>
+          <p:nvPr/>
+        </p:nvSpPr>
+        <p:spPr>
+          <a:xfrm xmlns:a="http://schemas.openxmlformats.org/drawingml/2006/main">
+            <a:off x="7162800" y="5124450"/>
+            <a:ext cx="4000500" cy="581025"/>
+          </a:xfrm>
+          <a:prstGeom xmlns:a="http://schemas.openxmlformats.org/drawingml/2006/main" prst="rect">
+            <a:avLst/>
+          </a:prstGeom>
+          <a:noFill xmlns:a="http://schemas.openxmlformats.org/drawingml/2006/main"/>
+          <a:ln xmlns:a="http://schemas.openxmlformats.org/drawingml/2006/main" w="0">
+            <a:noFill/>
+            <a:prstDash val="solid"/>
+          </a:ln>
+        </p:spPr>
+        <p:txBody>
+          <a:bodyPr xmlns:a="http://schemas.openxmlformats.org/drawingml/2006/main" lIns="0" tIns="0" rIns="0" bIns="0" anchor="t">
+            <a:normAutofit fontScale="100000"/>
+          </a:bodyPr>
+          <a:lstStyle xmlns:a="http://schemas.openxmlformats.org/drawingml/2006/main"/>
+          <a:p xmlns:a="http://schemas.openxmlformats.org/drawingml/2006/main">
+            <a:pPr algn="l">
+              <a:defRPr sz="1200" b="0">
+                <a:solidFill>
+                  <a:srgbClr val="475569"/>
+                </a:solidFill>
+                <a:latin typeface="Microsoft YaHei"/>
+                <a:ea typeface="Microsoft YaHei"/>
+                <a:cs typeface="Microsoft YaHei"/>
+              </a:defRPr>
+            </a:pPr>
+            <a:r>
+              <a:rPr sz="1200" b="0">
+                <a:solidFill>
+                  <a:srgbClr val="475569"/>
+                </a:solidFill>
+                <a:latin typeface="Microsoft YaHei"/>
+                <a:ea typeface="Microsoft YaHei"/>
+                <a:cs typeface="Microsoft YaHei"/>
+              </a:rPr>
+              <a:t>容量、几何和渲染检查通过后输出可编辑文件</a:t>
+            </a:r>
+          </a:p>
+        </p:txBody>
+      </p:sp>
+      <p:sp>
+        <p:nvSpPr>
+          <p:cNvPr id="38" name="">
+            <a:extLst xmlns:a="http://schemas.openxmlformats.org/drawingml/2006/main">
+              <a:ext uri="{FF2B5EF4-FFF2-40B4-BE49-F238E27FC236}">
+                <a16:creationId xmlns:a16="http://schemas.microsoft.com/office/drawing/2014/main" id="{AEBE51ED-466D-47E7-8556-AC21FC53B439}"/>
+              </a:ext>
+            </a:extLst>
+          </p:cNvPr>
+          <p:cNvSpPr>
+            <a:spLocks xmlns:a="http://schemas.openxmlformats.org/drawingml/2006/main" noGrp="1"/>
+          </p:cNvSpPr>
+          <p:nvPr/>
+        </p:nvSpPr>
+        <p:spPr>
+          <a:xfrm xmlns:a="http://schemas.openxmlformats.org/drawingml/2006/main">
+            <a:off x="4543425" y="5253038"/>
+            <a:ext cx="781050" cy="0"/>
           </a:xfrm>
           <a:prstGeom xmlns:a="http://schemas.openxmlformats.org/drawingml/2006/main" prst="line">
             <a:avLst/>
           </a:prstGeom>
           <a:noFill xmlns:a="http://schemas.openxmlformats.org/drawingml/2006/main"/>
-          <a:ln xmlns:a="http://schemas.openxmlformats.org/drawingml/2006/main" w="14288">
+          <a:ln xmlns:a="http://schemas.openxmlformats.org/drawingml/2006/main" w="12383">
             <a:solidFill>
-              <a:srgbClr val="00A8D8"/>
+              <a:srgbClr val="91B8D7"/>
             </a:solidFill>
             <a:prstDash val="dash"/>
           </a:ln>
@@ -1891,7 +2783,7 @@
     </p:spTree>
     <p:extLst>
       <p:ext uri="{BB962C8B-B14F-4D97-AF65-F5344CB8AC3E}">
-        <p14:creationId xmlns:p14="http://schemas.microsoft.com/office/powerpoint/2010/main" val="193254021"/>
+        <p14:creationId xmlns:p14="http://schemas.microsoft.com/office/powerpoint/2010/main" val="1049292011"/>
       </p:ext>
     </p:extLst>
   </p:cSld>
